--- a/system-design-101/vi/lessons/sd-13-015/slides/sd-13-015.pptx
+++ b/system-design-101/vi/lessons/sd-13-015/slides/sd-13-015.pptx
@@ -1794,7 +1794,7 @@
         <p:spPr>
           <a:xfrm>
             <a:off x="914400" y="1428750"/>
-            <a:ext cx="16192500" cy="2190750"/>
+            <a:ext cx="16192500" cy="2381250"/>
           </a:xfrm>
           <a:prstGeom prst="rect">
             <a:avLst/>
@@ -1803,17 +1803,17 @@
           <a:ln/>
         </p:spPr>
         <p:txBody>
-          <a:bodyPr wrap="square" lIns="0" tIns="54483" rIns="0" bIns="-54483" rtlCol="0" anchor="t"/>
+          <a:bodyPr wrap="square" lIns="0" tIns="66866" rIns="0" bIns="-66866" rtlCol="0" anchor="t"/>
           <a:lstStyle/>
           <a:p>
             <a:pPr algn="l" indent="0" marL="0">
               <a:lnSpc>
-                <a:spcPts val="6996"/>
+                <a:spcPts val="8586"/>
               </a:lnSpc>
               <a:buNone/>
             </a:pPr>
             <a:r>
-              <a:rPr lang="en-US" sz="6600" dirty="0" spc="-103" kern="0">
+              <a:rPr lang="en-US" sz="8100" dirty="0" spc="-126" kern="0">
                 <a:solidFill>
                   <a:srgbClr val="F3EEE3"/>
                 </a:solidFill>
@@ -1824,7 +1824,7 @@
               <a:t>Vòng</a:t>
             </a:r>
             <a:r>
-              <a:rPr lang="en-US" sz="6600" dirty="0" spc="-19" kern="0">
+              <a:rPr lang="en-US" sz="8100" dirty="0" spc="-25" kern="0">
                 <a:solidFill>
                   <a:srgbClr val="F3EEE3"/>
                 </a:solidFill>
@@ -1835,7 +1835,7 @@
               <a:t> đời</a:t>
             </a:r>
             <a:r>
-              <a:rPr lang="en-US" sz="6600" dirty="0" spc="-7" kern="0">
+              <a:rPr lang="en-US" sz="8100" dirty="0" spc="-10" kern="0">
                 <a:solidFill>
                   <a:srgbClr val="F3EEE3"/>
                 </a:solidFill>
@@ -1846,7 +1846,7 @@
               <a:t> một</a:t>
             </a:r>
             <a:r>
-              <a:rPr lang="en-US" sz="6600" dirty="0" spc="-1" kern="0">
+              <a:rPr lang="en-US" sz="8100" dirty="0" spc="0" kern="0">
                 <a:solidFill>
                   <a:srgbClr val="F3EEE3"/>
                 </a:solidFill>
@@ -1857,7 +1857,7 @@
               <a:t> tính năng</a:t>
             </a:r>
             <a:r>
-              <a:rPr lang="en-US" sz="6600" dirty="0" spc="1" kern="0">
+              <a:rPr lang="en-US" sz="8100" dirty="0" spc="2" kern="0">
                 <a:solidFill>
                   <a:srgbClr val="F3EEE3"/>
                 </a:solidFill>
@@ -1868,7 +1868,7 @@
               <a:t> có</a:t>
             </a:r>
             <a:r>
-              <a:rPr lang="en-US" sz="6600" dirty="0" spc="-58" kern="0">
+              <a:rPr lang="en-US" sz="8100" dirty="0" spc="-72" kern="0">
                 <a:solidFill>
                   <a:srgbClr val="F3EEE3"/>
                 </a:solidFill>
@@ -1879,7 +1879,7 @@
               <a:t> cờ:</a:t>
             </a:r>
             <a:r>
-              <a:rPr lang="en-US" sz="6600" dirty="0" spc="2" kern="0">
+              <a:rPr lang="en-US" sz="8100" dirty="0" spc="0" kern="0">
                 <a:solidFill>
                   <a:srgbClr val="F3EEE3"/>
                 </a:solidFill>
@@ -1890,7 +1890,7 @@
               <a:t> từ</a:t>
             </a:r>
             <a:r>
-              <a:rPr lang="en-US" sz="6600" dirty="0" spc="0" kern="0">
+              <a:rPr lang="en-US" sz="8100" dirty="0" spc="-1" kern="0">
                 <a:solidFill>
                   <a:srgbClr val="F3EEE3"/>
                 </a:solidFill>
@@ -1901,7 +1901,7 @@
               <a:t> mã</a:t>
             </a:r>
             <a:r>
-              <a:rPr lang="en-US" sz="6600" dirty="0" spc="13" kern="0">
+              <a:rPr lang="en-US" sz="8100" dirty="0" spc="14" kern="0">
                 <a:solidFill>
                   <a:srgbClr val="F3EEE3"/>
                 </a:solidFill>
@@ -1912,7 +1912,7 @@
               <a:t> đã</a:t>
             </a:r>
             <a:r>
-              <a:rPr lang="en-US" sz="6600" dirty="0" spc="0" kern="0">
+              <a:rPr lang="en-US" sz="8100" dirty="0" spc="2" kern="0">
                 <a:solidFill>
                   <a:srgbClr val="F3EEE3"/>
                 </a:solidFill>
@@ -1923,7 +1923,7 @@
               <a:t> lên</a:t>
             </a:r>
             <a:r>
-              <a:rPr lang="en-US" sz="6600" dirty="0" spc="14" kern="0">
+              <a:rPr lang="en-US" sz="8100" dirty="0" spc="19" kern="0">
                 <a:solidFill>
                   <a:srgbClr val="F3EEE3"/>
                 </a:solidFill>
@@ -1934,7 +1934,7 @@
               <a:t> đến</a:t>
             </a:r>
             <a:r>
-              <a:rPr lang="en-US" sz="6600" dirty="0" spc="2" kern="0">
+              <a:rPr lang="en-US" sz="8100" dirty="0" spc="1" kern="0">
                 <a:solidFill>
                   <a:srgbClr val="F3EEE3"/>
                 </a:solidFill>
@@ -1945,7 +1945,7 @@
               <a:t> dọn</a:t>
             </a:r>
             <a:r>
-              <a:rPr lang="en-US" sz="6600" dirty="0" spc="-1" kern="0">
+              <a:rPr lang="en-US" sz="8100" dirty="0" spc="-1" kern="0">
                 <a:solidFill>
                   <a:srgbClr val="F3EEE3"/>
                 </a:solidFill>
@@ -1955,7 +1955,7 @@
               </a:rPr>
               <a:t> cờ</a:t>
             </a:r>
-            <a:endParaRPr lang="en-US" sz="6600" dirty="0"/>
+            <a:endParaRPr lang="en-US" sz="8100" dirty="0"/>
           </a:p>
         </p:txBody>
       </p:sp>
@@ -2697,7 +2697,7 @@
               <a:t> nhóm</a:t>
             </a:r>
             <a:r>
-              <a:rPr lang="en-US" sz="1650" dirty="0" spc="-3" kern="0">
+              <a:rPr lang="en-US" sz="1650" dirty="0" spc="-4" kern="0">
                 <a:solidFill>
                   <a:srgbClr val="9AA0B5"/>
                 </a:solidFill>
@@ -2705,10 +2705,10 @@
                 <a:ea typeface="Be Vietnam Pro" pitchFamily="34" charset="-122"/>
                 <a:cs typeface="Be Vietnam Pro" pitchFamily="34" charset="-120"/>
               </a:rPr>
-              <a:t> Quan</a:t>
-            </a:r>
-            <a:r>
-              <a:rPr lang="en-US" sz="1650" dirty="0" spc="-9" kern="0">
+              <a:t> DevOps</a:t>
+            </a:r>
+            <a:r>
+              <a:rPr lang="en-US" sz="1650" dirty="0" spc="-7" kern="0">
                 <a:solidFill>
                   <a:srgbClr val="9AA0B5"/>
                 </a:solidFill>
@@ -2716,7 +2716,7 @@
                 <a:ea typeface="Be Vietnam Pro" pitchFamily="34" charset="-122"/>
                 <a:cs typeface="Be Vietnam Pro" pitchFamily="34" charset="-120"/>
               </a:rPr>
-              <a:t> sát</a:t>
+              <a:t> và</a:t>
             </a:r>
             <a:r>
               <a:rPr lang="en-US" sz="1650" dirty="0" spc="3" kern="0">
@@ -2727,18 +2727,7 @@
                 <a:ea typeface="Be Vietnam Pro" pitchFamily="34" charset="-122"/>
                 <a:cs typeface="Be Vietnam Pro" pitchFamily="34" charset="-120"/>
               </a:rPr>
-              <a:t> hệ</a:t>
-            </a:r>
-            <a:r>
-              <a:rPr lang="en-US" sz="1650" dirty="0" spc="1" kern="0">
-                <a:solidFill>
-                  <a:srgbClr val="9AA0B5"/>
-                </a:solidFill>
-                <a:latin typeface="Be Vietnam Pro" pitchFamily="34" charset="0"/>
-                <a:ea typeface="Be Vietnam Pro" pitchFamily="34" charset="-122"/>
-                <a:cs typeface="Be Vietnam Pro" pitchFamily="34" charset="-120"/>
-              </a:rPr>
-              <a:t> thống</a:t>
+              <a:t> CI/CD</a:t>
             </a:r>
             <a:endParaRPr lang="en-US" sz="1650" dirty="0"/>
           </a:p>
@@ -2871,7 +2860,7 @@
         <p:spPr>
           <a:xfrm>
             <a:off x="914400" y="1295400"/>
-            <a:ext cx="16192500" cy="914400"/>
+            <a:ext cx="16192500" cy="1085850"/>
           </a:xfrm>
           <a:prstGeom prst="rect">
             <a:avLst/>
@@ -2887,7 +2876,7 @@
               <a:buNone/>
             </a:pPr>
             <a:r>
-              <a:rPr lang="en-US" sz="5400" dirty="0" spc="-66" kern="0">
+              <a:rPr lang="en-US" sz="6900" dirty="0" spc="-83" kern="0">
                 <a:solidFill>
                   <a:srgbClr val="F3EEE3"/>
                 </a:solidFill>
@@ -2898,7 +2887,7 @@
               <a:t>Tra</a:t>
             </a:r>
             <a:r>
-              <a:rPr lang="en-US" sz="5400" dirty="0" spc="-2" kern="0">
+              <a:rPr lang="en-US" sz="6900" dirty="0" spc="0" kern="0">
                 <a:solidFill>
                   <a:srgbClr val="F3EEE3"/>
                 </a:solidFill>
@@ -2906,10 +2895,10 @@
                 <a:ea typeface="Bricolage Grotesque ExtraBold" pitchFamily="34" charset="-122"/>
                 <a:cs typeface="Bricolage Grotesque ExtraBold" pitchFamily="34" charset="-120"/>
               </a:rPr>
-              <a:t> lại khi</a:t>
-            </a:r>
-            <a:r>
-              <a:rPr lang="en-US" sz="5400" dirty="0" spc="-3" kern="0">
+              <a:t> lại</a:t>
+            </a:r>
+            <a:r>
+              <a:rPr lang="en-US" sz="6900" dirty="0" spc="1" kern="0">
                 <a:solidFill>
                   <a:srgbClr val="F3EEE3"/>
                 </a:solidFill>
@@ -2917,9 +2906,20 @@
                 <a:ea typeface="Bricolage Grotesque ExtraBold" pitchFamily="34" charset="-122"/>
                 <a:cs typeface="Bricolage Grotesque ExtraBold" pitchFamily="34" charset="-120"/>
               </a:rPr>
+              <a:t> khi</a:t>
+            </a:r>
+            <a:r>
+              <a:rPr lang="en-US" sz="6900" dirty="0" spc="-2" kern="0">
+                <a:solidFill>
+                  <a:srgbClr val="F3EEE3"/>
+                </a:solidFill>
+                <a:latin typeface="Bricolage Grotesque ExtraBold" pitchFamily="34" charset="0"/>
+                <a:ea typeface="Bricolage Grotesque ExtraBold" pitchFamily="34" charset="-122"/>
+                <a:cs typeface="Bricolage Grotesque ExtraBold" pitchFamily="34" charset="-120"/>
+              </a:rPr>
               <a:t> cần</a:t>
             </a:r>
-            <a:endParaRPr lang="en-US" sz="5400" dirty="0"/>
+            <a:endParaRPr lang="en-US" sz="6900" dirty="0"/>
           </a:p>
         </p:txBody>
       </p:sp>
@@ -4087,17 +4087,17 @@
           <a:ln/>
         </p:spPr>
         <p:txBody>
-          <a:bodyPr wrap="square" lIns="0" tIns="32004" rIns="0" bIns="-32004" rtlCol="0" anchor="t"/>
+          <a:bodyPr wrap="square" lIns="0" tIns="35052" rIns="0" bIns="-35052" rtlCol="0" anchor="t"/>
           <a:lstStyle/>
           <a:p>
             <a:pPr algn="l" indent="0" marL="0">
               <a:lnSpc>
-                <a:spcPts val="7056"/>
+                <a:spcPts val="7728"/>
               </a:lnSpc>
               <a:buNone/>
             </a:pPr>
             <a:r>
-              <a:rPr lang="en-US" sz="6300" dirty="0" spc="-111" kern="0">
+              <a:rPr lang="en-US" sz="6900" dirty="0" spc="-123" kern="0">
                 <a:solidFill>
                   <a:srgbClr val="14161C"/>
                 </a:solidFill>
@@ -4108,7 +4108,7 @@
               <a:t>Tách</a:t>
             </a:r>
             <a:r>
-              <a:rPr lang="en-US" sz="6300" dirty="0" spc="-1" kern="0">
+              <a:rPr lang="en-US" sz="6900" dirty="0" spc="-1" kern="0">
                 <a:solidFill>
                   <a:srgbClr val="14161C"/>
                 </a:solidFill>
@@ -4119,7 +4119,7 @@
               <a:t> việc</a:t>
             </a:r>
             <a:r>
-              <a:rPr lang="en-US" sz="6300" dirty="0" spc="-37" kern="0">
+              <a:rPr lang="en-US" sz="6900" dirty="0" spc="-46" kern="0">
                 <a:solidFill>
                   <a:srgbClr val="14161C"/>
                 </a:solidFill>
@@ -4130,7 +4130,7 @@
               <a:t> đưa</a:t>
             </a:r>
             <a:r>
-              <a:rPr lang="en-US" sz="6300" dirty="0" spc="1" kern="0">
+              <a:rPr lang="en-US" sz="6900" dirty="0" spc="-2" kern="0">
                 <a:solidFill>
                   <a:srgbClr val="14161C"/>
                 </a:solidFill>
@@ -4141,7 +4141,7 @@
               <a:t> mã</a:t>
             </a:r>
             <a:r>
-              <a:rPr lang="en-US" sz="6300" dirty="0" spc="4" kern="0">
+              <a:rPr lang="en-US" sz="6900" dirty="0" spc="6" kern="0">
                 <a:solidFill>
                   <a:srgbClr val="14161C"/>
                 </a:solidFill>
@@ -4152,7 +4152,7 @@
               <a:t> lên</a:t>
             </a:r>
             <a:r>
-              <a:rPr lang="en-US" sz="6300" dirty="0" spc="0" kern="0">
+              <a:rPr lang="en-US" sz="6900" dirty="0" spc="0" kern="0">
                 <a:solidFill>
                   <a:srgbClr val="14161C"/>
                 </a:solidFill>
@@ -4160,10 +4160,10 @@
                 <a:ea typeface="Bricolage Grotesque ExtraBold" pitchFamily="34" charset="-122"/>
                 <a:cs typeface="Bricolage Grotesque ExtraBold" pitchFamily="34" charset="-120"/>
               </a:rPr>
-              <a:t> khỏi</a:t>
-            </a:r>
-            <a:r>
-              <a:rPr lang="en-US" sz="6300" dirty="0" spc="-1" kern="0">
+              <a:t> khỏi việc</a:t>
+            </a:r>
+            <a:r>
+              <a:rPr lang="en-US" sz="6900" dirty="0" spc="-66" kern="0">
                 <a:solidFill>
                   <a:srgbClr val="14161C"/>
                 </a:solidFill>
@@ -4171,10 +4171,10 @@
                 <a:ea typeface="Bricolage Grotesque ExtraBold" pitchFamily="34" charset="-122"/>
                 <a:cs typeface="Bricolage Grotesque ExtraBold" pitchFamily="34" charset="-120"/>
               </a:rPr>
-              <a:t> việc</a:t>
-            </a:r>
-            <a:r>
-              <a:rPr lang="en-US" sz="6300" dirty="0" spc="-58" kern="0">
+              <a:t> người</a:t>
+            </a:r>
+            <a:r>
+              <a:rPr lang="en-US" sz="6900" dirty="0" spc="2" kern="0">
                 <a:solidFill>
                   <a:srgbClr val="14161C"/>
                 </a:solidFill>
@@ -4182,10 +4182,10 @@
                 <a:ea typeface="Bricolage Grotesque ExtraBold" pitchFamily="34" charset="-122"/>
                 <a:cs typeface="Bricolage Grotesque ExtraBold" pitchFamily="34" charset="-120"/>
               </a:rPr>
-              <a:t> người</a:t>
-            </a:r>
-            <a:r>
-              <a:rPr lang="en-US" sz="6300" dirty="0" spc="1" kern="0">
+              <a:t> dùng</a:t>
+            </a:r>
+            <a:r>
+              <a:rPr lang="en-US" sz="6900" dirty="0" spc="-3" kern="0">
                 <a:solidFill>
                   <a:srgbClr val="14161C"/>
                 </a:solidFill>
@@ -4193,20 +4193,9 @@
                 <a:ea typeface="Bricolage Grotesque ExtraBold" pitchFamily="34" charset="-122"/>
                 <a:cs typeface="Bricolage Grotesque ExtraBold" pitchFamily="34" charset="-120"/>
               </a:rPr>
-              <a:t> dùng</a:t>
-            </a:r>
-            <a:r>
-              <a:rPr lang="en-US" sz="6300" dirty="0" spc="-1" kern="0">
-                <a:solidFill>
-                  <a:srgbClr val="14161C"/>
-                </a:solidFill>
-                <a:latin typeface="Bricolage Grotesque ExtraBold" pitchFamily="34" charset="0"/>
-                <a:ea typeface="Bricolage Grotesque ExtraBold" pitchFamily="34" charset="-122"/>
-                <a:cs typeface="Bricolage Grotesque ExtraBold" pitchFamily="34" charset="-120"/>
-              </a:rPr>
               <a:t> thấy.</a:t>
             </a:r>
-            <a:endParaRPr lang="en-US" sz="6300" dirty="0"/>
+            <a:endParaRPr lang="en-US" sz="6900" dirty="0"/>
           </a:p>
         </p:txBody>
       </p:sp>
@@ -5140,7 +5129,7 @@
         <p:spPr>
           <a:xfrm>
             <a:off x="914400" y="1333500"/>
-            <a:ext cx="16459200" cy="952500"/>
+            <a:ext cx="16459200" cy="1085850"/>
           </a:xfrm>
           <a:prstGeom prst="rect">
             <a:avLst/>
@@ -5156,7 +5145,7 @@
               <a:buNone/>
             </a:pPr>
             <a:r>
-              <a:rPr lang="en-US" sz="5100" dirty="0" spc="-1" kern="0">
+              <a:rPr lang="en-US" sz="6900" dirty="0" spc="-3" kern="0">
                 <a:solidFill>
                   <a:srgbClr val="14161C"/>
                 </a:solidFill>
@@ -5167,7 +5156,7 @@
               <a:t>Mã</a:t>
             </a:r>
             <a:r>
-              <a:rPr lang="en-US" sz="5100" dirty="0" spc="5" kern="0">
+              <a:rPr lang="en-US" sz="6900" dirty="0" spc="6" kern="0">
                 <a:solidFill>
                   <a:srgbClr val="14161C"/>
                 </a:solidFill>
@@ -5178,7 +5167,7 @@
               <a:t> lên</a:t>
             </a:r>
             <a:r>
-              <a:rPr lang="en-US" sz="5100" dirty="0" spc="-62" kern="0">
+              <a:rPr lang="en-US" sz="6900" dirty="0" spc="-85" kern="0">
                 <a:solidFill>
                   <a:srgbClr val="14161C"/>
                 </a:solidFill>
@@ -5189,7 +5178,7 @@
               <a:t> với</a:t>
             </a:r>
             <a:r>
-              <a:rPr lang="en-US" sz="5100" dirty="0" spc="-4" kern="0">
+              <a:rPr lang="en-US" sz="6900" dirty="0" spc="-3" kern="0">
                 <a:solidFill>
                   <a:srgbClr val="14161C"/>
                 </a:solidFill>
@@ -5200,7 +5189,7 @@
               <a:t> cờ</a:t>
             </a:r>
             <a:r>
-              <a:rPr lang="en-US" sz="5100" dirty="0" spc="7" kern="0">
+              <a:rPr lang="en-US" sz="6900" dirty="0" spc="10" kern="0">
                 <a:solidFill>
                   <a:srgbClr val="14161C"/>
                 </a:solidFill>
@@ -5211,7 +5200,7 @@
               <a:t> tắt,</a:t>
             </a:r>
             <a:r>
-              <a:rPr lang="en-US" sz="5100" dirty="0" spc="-13" kern="0">
+              <a:rPr lang="en-US" sz="6900" dirty="0" spc="1" kern="0">
                 <a:solidFill>
                   <a:srgbClr val="14161C"/>
                 </a:solidFill>
@@ -5219,10 +5208,10 @@
                 <a:ea typeface="Bricolage Grotesque ExtraBold" pitchFamily="34" charset="-122"/>
                 <a:cs typeface="Bricolage Grotesque ExtraBold" pitchFamily="34" charset="-120"/>
               </a:rPr>
-              <a:t> rồi</a:t>
-            </a:r>
-            <a:r>
-              <a:rPr lang="en-US" sz="5100" dirty="0" spc="1" kern="0">
+              <a:t> thử</a:t>
+            </a:r>
+            <a:r>
+              <a:rPr lang="en-US" sz="6900" dirty="0" spc="2" kern="0">
                 <a:solidFill>
                   <a:srgbClr val="14161C"/>
                 </a:solidFill>
@@ -5230,31 +5219,9 @@
                 <a:ea typeface="Bricolage Grotesque ExtraBold" pitchFamily="34" charset="-122"/>
                 <a:cs typeface="Bricolage Grotesque ExtraBold" pitchFamily="34" charset="-120"/>
               </a:rPr>
-              <a:t> thử</a:t>
-            </a:r>
-            <a:r>
-              <a:rPr lang="en-US" sz="5100" dirty="0" spc="-1" kern="0">
-                <a:solidFill>
-                  <a:srgbClr val="14161C"/>
-                </a:solidFill>
-                <a:latin typeface="Bricolage Grotesque ExtraBold" pitchFamily="34" charset="0"/>
-                <a:ea typeface="Bricolage Grotesque ExtraBold" pitchFamily="34" charset="-122"/>
-                <a:cs typeface="Bricolage Grotesque ExtraBold" pitchFamily="34" charset="-120"/>
-              </a:rPr>
-              <a:t> cả</a:t>
-            </a:r>
-            <a:r>
-              <a:rPr lang="en-US" sz="5100" dirty="0" spc="2" kern="0">
-                <a:solidFill>
-                  <a:srgbClr val="14161C"/>
-                </a:solidFill>
-                <a:latin typeface="Bricolage Grotesque ExtraBold" pitchFamily="34" charset="0"/>
-                <a:ea typeface="Bricolage Grotesque ExtraBold" pitchFamily="34" charset="-122"/>
-                <a:cs typeface="Bricolage Grotesque ExtraBold" pitchFamily="34" charset="-120"/>
-              </a:rPr>
               <a:t> hai nhánh</a:t>
             </a:r>
-            <a:endParaRPr lang="en-US" sz="5100" dirty="0"/>
+            <a:endParaRPr lang="en-US" sz="6900" dirty="0"/>
           </a:p>
         </p:txBody>
       </p:sp>
@@ -6804,7 +6771,7 @@
         <p:spPr>
           <a:xfrm>
             <a:off x="914400" y="1333500"/>
-            <a:ext cx="16459200" cy="952500"/>
+            <a:ext cx="16459200" cy="1085850"/>
           </a:xfrm>
           <a:prstGeom prst="rect">
             <a:avLst/>
@@ -6820,7 +6787,7 @@
               <a:buNone/>
             </a:pPr>
             <a:r>
-              <a:rPr lang="en-US" sz="5100" dirty="0" spc="-1" kern="0">
+              <a:rPr lang="en-US" sz="6900" dirty="0" spc="-2" kern="0">
                 <a:solidFill>
                   <a:srgbClr val="F3EEE3"/>
                 </a:solidFill>
@@ -6828,10 +6795,10 @@
                 <a:ea typeface="Bricolage Grotesque ExtraBold" pitchFamily="34" charset="-122"/>
                 <a:cs typeface="Bricolage Grotesque ExtraBold" pitchFamily="34" charset="-120"/>
               </a:rPr>
-              <a:t>Mở dần,</a:t>
-            </a:r>
-            <a:r>
-              <a:rPr lang="en-US" sz="5100" dirty="0" spc="-63" kern="0">
+              <a:t>Mở</a:t>
+            </a:r>
+            <a:r>
+              <a:rPr lang="en-US" sz="6900" dirty="0" spc="-1" kern="0">
                 <a:solidFill>
                   <a:srgbClr val="F3EEE3"/>
                 </a:solidFill>
@@ -6839,10 +6806,10 @@
                 <a:ea typeface="Bricolage Grotesque ExtraBold" pitchFamily="34" charset="-122"/>
                 <a:cs typeface="Bricolage Grotesque ExtraBold" pitchFamily="34" charset="-120"/>
               </a:rPr>
-              <a:t> với</a:t>
-            </a:r>
-            <a:r>
-              <a:rPr lang="en-US" sz="5100" dirty="0" spc="21" kern="0">
+              <a:t> dần,</a:t>
+            </a:r>
+            <a:r>
+              <a:rPr lang="en-US" sz="6900" dirty="0" spc="28" kern="0">
                 <a:solidFill>
                   <a:srgbClr val="F3EEE3"/>
                 </a:solidFill>
@@ -6853,7 +6820,7 @@
               <a:t> điều</a:t>
             </a:r>
             <a:r>
-              <a:rPr lang="en-US" sz="5100" dirty="0" spc="3" kern="0">
+              <a:rPr lang="en-US" sz="6900" dirty="0" spc="4" kern="0">
                 <a:solidFill>
                   <a:srgbClr val="F3EEE3"/>
                 </a:solidFill>
@@ -6864,7 +6831,7 @@
               <a:t> kiện</a:t>
             </a:r>
             <a:r>
-              <a:rPr lang="en-US" sz="5100" dirty="0" spc="6" kern="0">
+              <a:rPr lang="en-US" sz="6900" dirty="0" spc="8" kern="0">
                 <a:solidFill>
                   <a:srgbClr val="F3EEE3"/>
                 </a:solidFill>
@@ -6875,7 +6842,7 @@
               <a:t> dừng đặt</a:t>
             </a:r>
             <a:r>
-              <a:rPr lang="en-US" sz="5100" dirty="0" spc="-58" kern="0">
+              <a:rPr lang="en-US" sz="6900" dirty="0" spc="-79" kern="0">
                 <a:solidFill>
                   <a:srgbClr val="F3EEE3"/>
                 </a:solidFill>
@@ -6885,7 +6852,7 @@
               </a:rPr>
               <a:t> trước</a:t>
             </a:r>
-            <a:endParaRPr lang="en-US" sz="5100" dirty="0"/>
+            <a:endParaRPr lang="en-US" sz="6900" dirty="0"/>
           </a:p>
         </p:txBody>
       </p:sp>
@@ -8339,7 +8306,7 @@
         <p:spPr>
           <a:xfrm>
             <a:off x="914400" y="1333500"/>
-            <a:ext cx="16459200" cy="952500"/>
+            <a:ext cx="16459200" cy="1085850"/>
           </a:xfrm>
           <a:prstGeom prst="rect">
             <a:avLst/>
@@ -8355,7 +8322,7 @@
               <a:buNone/>
             </a:pPr>
             <a:r>
-              <a:rPr lang="en-US" sz="5100" dirty="0" spc="-1" kern="0">
+              <a:rPr lang="en-US" sz="6900" dirty="0" spc="-2" kern="0">
                 <a:solidFill>
                   <a:srgbClr val="14161C"/>
                 </a:solidFill>
@@ -8366,7 +8333,7 @@
               <a:t>Mở</a:t>
             </a:r>
             <a:r>
-              <a:rPr lang="en-US" sz="5100" dirty="0" spc="12" kern="0">
+              <a:rPr lang="en-US" sz="6900" dirty="0" spc="16" kern="0">
                 <a:solidFill>
                   <a:srgbClr val="14161C"/>
                 </a:solidFill>
@@ -8377,7 +8344,7 @@
               <a:t> hết,</a:t>
             </a:r>
             <a:r>
-              <a:rPr lang="en-US" sz="5100" dirty="0" spc="6" kern="0">
+              <a:rPr lang="en-US" sz="6900" dirty="0" spc="8" kern="0">
                 <a:solidFill>
                   <a:srgbClr val="14161C"/>
                 </a:solidFill>
@@ -8388,7 +8355,7 @@
               <a:t> nhưng</a:t>
             </a:r>
             <a:r>
-              <a:rPr lang="en-US" sz="5100" dirty="0" spc="-34" kern="0">
+              <a:rPr lang="en-US" sz="6900" dirty="0" spc="-48" kern="0">
                 <a:solidFill>
                   <a:srgbClr val="14161C"/>
                 </a:solidFill>
@@ -8399,7 +8366,7 @@
               <a:t> chưa</a:t>
             </a:r>
             <a:r>
-              <a:rPr lang="en-US" sz="5100" dirty="0" spc="-73" kern="0">
+              <a:rPr lang="en-US" sz="6900" dirty="0" spc="-96" kern="0">
                 <a:solidFill>
                   <a:srgbClr val="14161C"/>
                 </a:solidFill>
@@ -8410,7 +8377,7 @@
               <a:t> xóa</a:t>
             </a:r>
             <a:r>
-              <a:rPr lang="en-US" sz="5100" dirty="0" spc="-3" kern="0">
+              <a:rPr lang="en-US" sz="6900" dirty="0" spc="-2" kern="0">
                 <a:solidFill>
                   <a:srgbClr val="14161C"/>
                 </a:solidFill>
@@ -8421,7 +8388,7 @@
               <a:t> cờ</a:t>
             </a:r>
             <a:r>
-              <a:rPr lang="en-US" sz="5100" dirty="0" spc="-10" kern="0">
+              <a:rPr lang="en-US" sz="6900" dirty="0" spc="-14" kern="0">
                 <a:solidFill>
                   <a:srgbClr val="14161C"/>
                 </a:solidFill>
@@ -8431,7 +8398,7 @@
               </a:rPr>
               <a:t> ngay</a:t>
             </a:r>
-            <a:endParaRPr lang="en-US" sz="5100" dirty="0"/>
+            <a:endParaRPr lang="en-US" sz="6900" dirty="0"/>
           </a:p>
         </p:txBody>
       </p:sp>
@@ -9628,7 +9595,7 @@
         <p:spPr>
           <a:xfrm>
             <a:off x="914400" y="1333500"/>
-            <a:ext cx="16459200" cy="952500"/>
+            <a:ext cx="16459200" cy="1085850"/>
           </a:xfrm>
           <a:prstGeom prst="rect">
             <a:avLst/>
@@ -9644,7 +9611,7 @@
               <a:buNone/>
             </a:pPr>
             <a:r>
-              <a:rPr lang="en-US" sz="5100" dirty="0" spc="-107" kern="0">
+              <a:rPr lang="en-US" sz="6900" dirty="0" spc="-146" kern="0">
                 <a:solidFill>
                   <a:srgbClr val="14161C"/>
                 </a:solidFill>
@@ -9655,7 +9622,7 @@
               <a:t>Xóa</a:t>
             </a:r>
             <a:r>
-              <a:rPr lang="en-US" sz="5100" dirty="0" spc="-3" kern="0">
+              <a:rPr lang="en-US" sz="6900" dirty="0" spc="-3" kern="0">
                 <a:solidFill>
                   <a:srgbClr val="14161C"/>
                 </a:solidFill>
@@ -9666,7 +9633,7 @@
               <a:t> cờ</a:t>
             </a:r>
             <a:r>
-              <a:rPr lang="en-US" sz="5100" dirty="0" spc="-56" kern="0">
+              <a:rPr lang="en-US" sz="6900" dirty="0" spc="-76" kern="0">
                 <a:solidFill>
                   <a:srgbClr val="14161C"/>
                 </a:solidFill>
@@ -9677,7 +9644,7 @@
               <a:t> và</a:t>
             </a:r>
             <a:r>
-              <a:rPr lang="en-US" sz="5100" dirty="0" spc="2" kern="0">
+              <a:rPr lang="en-US" sz="6900" dirty="0" spc="3" kern="0">
                 <a:solidFill>
                   <a:srgbClr val="14161C"/>
                 </a:solidFill>
@@ -9688,7 +9655,7 @@
               <a:t> nhánh</a:t>
             </a:r>
             <a:r>
-              <a:rPr lang="en-US" sz="5100" dirty="0" spc="0" kern="0">
+              <a:rPr lang="en-US" sz="6900" dirty="0" spc="0" kern="0">
                 <a:solidFill>
                   <a:srgbClr val="14161C"/>
                 </a:solidFill>
@@ -9696,10 +9663,10 @@
                 <a:ea typeface="Bricolage Grotesque ExtraBold" pitchFamily="34" charset="-122"/>
                 <a:cs typeface="Bricolage Grotesque ExtraBold" pitchFamily="34" charset="-120"/>
               </a:rPr>
-              <a:t> cũ</a:t>
-            </a:r>
-            <a:r>
-              <a:rPr lang="en-US" sz="5100" dirty="0" spc="2" kern="0">
+              <a:t> cũ khỏi</a:t>
+            </a:r>
+            <a:r>
+              <a:rPr lang="en-US" sz="6900" dirty="0" spc="-2" kern="0">
                 <a:solidFill>
                   <a:srgbClr val="14161C"/>
                 </a:solidFill>
@@ -9707,20 +9674,9 @@
                 <a:ea typeface="Bricolage Grotesque ExtraBold" pitchFamily="34" charset="-122"/>
                 <a:cs typeface="Bricolage Grotesque ExtraBold" pitchFamily="34" charset="-120"/>
               </a:rPr>
-              <a:t> khỏi</a:t>
-            </a:r>
-            <a:r>
-              <a:rPr lang="en-US" sz="5100" dirty="0" spc="-4" kern="0">
-                <a:solidFill>
-                  <a:srgbClr val="14161C"/>
-                </a:solidFill>
-                <a:latin typeface="Bricolage Grotesque ExtraBold" pitchFamily="34" charset="0"/>
-                <a:ea typeface="Bricolage Grotesque ExtraBold" pitchFamily="34" charset="-122"/>
-                <a:cs typeface="Bricolage Grotesque ExtraBold" pitchFamily="34" charset="-120"/>
-              </a:rPr>
               <a:t> mã</a:t>
             </a:r>
-            <a:endParaRPr lang="en-US" sz="5100" dirty="0"/>
+            <a:endParaRPr lang="en-US" sz="6900" dirty="0"/>
           </a:p>
         </p:txBody>
       </p:sp>
@@ -10942,7 +10898,7 @@
         <p:spPr>
           <a:xfrm>
             <a:off x="914400" y="1333500"/>
-            <a:ext cx="16459200" cy="952500"/>
+            <a:ext cx="16459200" cy="1085850"/>
           </a:xfrm>
           <a:prstGeom prst="rect">
             <a:avLst/>
@@ -10958,7 +10914,7 @@
               <a:buNone/>
             </a:pPr>
             <a:r>
-              <a:rPr lang="en-US" sz="5100" dirty="0" spc="0" kern="0">
+              <a:rPr lang="en-US" sz="6900" dirty="0" spc="2" kern="0">
                 <a:solidFill>
                   <a:srgbClr val="F3EEE3"/>
                 </a:solidFill>
@@ -10969,7 +10925,7 @@
               <a:t>Cờ</a:t>
             </a:r>
             <a:r>
-              <a:rPr lang="en-US" sz="5100" dirty="0" spc="1" kern="0">
+              <a:rPr lang="en-US" sz="6900" dirty="0" spc="0" kern="0">
                 <a:solidFill>
                   <a:srgbClr val="F3EEE3"/>
                 </a:solidFill>
@@ -10980,7 +10936,7 @@
               <a:t> không</a:t>
             </a:r>
             <a:r>
-              <a:rPr lang="en-US" sz="5100" dirty="0" spc="3" kern="0">
+              <a:rPr lang="en-US" sz="6900" dirty="0" spc="4" kern="0">
                 <a:solidFill>
                   <a:srgbClr val="F3EEE3"/>
                 </a:solidFill>
@@ -10991,7 +10947,7 @@
               <a:t> miễn</a:t>
             </a:r>
             <a:r>
-              <a:rPr lang="en-US" sz="5100" dirty="0" spc="2" kern="0">
+              <a:rPr lang="en-US" sz="6900" dirty="0" spc="0" kern="0">
                 <a:solidFill>
                   <a:srgbClr val="F3EEE3"/>
                 </a:solidFill>
@@ -10999,10 +10955,10 @@
                 <a:ea typeface="Bricolage Grotesque ExtraBold" pitchFamily="34" charset="-122"/>
                 <a:cs typeface="Bricolage Grotesque ExtraBold" pitchFamily="34" charset="-120"/>
               </a:rPr>
-              <a:t> phí,</a:t>
-            </a:r>
-            <a:r>
-              <a:rPr lang="en-US" sz="5100" dirty="0" spc="0" kern="0">
+              <a:t> phí, không</a:t>
+            </a:r>
+            <a:r>
+              <a:rPr lang="en-US" sz="6900" dirty="0" spc="6" kern="0">
                 <a:solidFill>
                   <a:srgbClr val="F3EEE3"/>
                 </a:solidFill>
@@ -11010,10 +10966,10 @@
                 <a:ea typeface="Bricolage Grotesque ExtraBold" pitchFamily="34" charset="-122"/>
                 <a:cs typeface="Bricolage Grotesque ExtraBold" pitchFamily="34" charset="-120"/>
               </a:rPr>
-              <a:t> cũng</a:t>
-            </a:r>
-            <a:r>
-              <a:rPr lang="en-US" sz="5100" dirty="0" spc="1" kern="0">
+              <a:t> phủ</a:t>
+            </a:r>
+            <a:r>
+              <a:rPr lang="en-US" sz="6900" dirty="0" spc="3" kern="0">
                 <a:solidFill>
                   <a:srgbClr val="F3EEE3"/>
                 </a:solidFill>
@@ -11021,31 +10977,9 @@
                 <a:ea typeface="Bricolage Grotesque ExtraBold" pitchFamily="34" charset="-122"/>
                 <a:cs typeface="Bricolage Grotesque ExtraBold" pitchFamily="34" charset="-120"/>
               </a:rPr>
-              <a:t> không</a:t>
-            </a:r>
-            <a:r>
-              <a:rPr lang="en-US" sz="5100" dirty="0" spc="5" kern="0">
-                <a:solidFill>
-                  <a:srgbClr val="F3EEE3"/>
-                </a:solidFill>
-                <a:latin typeface="Bricolage Grotesque ExtraBold" pitchFamily="34" charset="0"/>
-                <a:ea typeface="Bricolage Grotesque ExtraBold" pitchFamily="34" charset="-122"/>
-                <a:cs typeface="Bricolage Grotesque ExtraBold" pitchFamily="34" charset="-120"/>
-              </a:rPr>
-              <a:t> phủ</a:t>
-            </a:r>
-            <a:r>
-              <a:rPr lang="en-US" sz="5100" dirty="0" spc="1" kern="0">
-                <a:solidFill>
-                  <a:srgbClr val="F3EEE3"/>
-                </a:solidFill>
-                <a:latin typeface="Bricolage Grotesque ExtraBold" pitchFamily="34" charset="0"/>
-                <a:ea typeface="Bricolage Grotesque ExtraBold" pitchFamily="34" charset="-122"/>
-                <a:cs typeface="Bricolage Grotesque ExtraBold" pitchFamily="34" charset="-120"/>
-              </a:rPr>
               <a:t> hết</a:t>
             </a:r>
-            <a:endParaRPr lang="en-US" sz="5100" dirty="0"/>
+            <a:endParaRPr lang="en-US" sz="6900" dirty="0"/>
           </a:p>
         </p:txBody>
       </p:sp>
@@ -12308,7 +12242,7 @@
         <p:spPr>
           <a:xfrm>
             <a:off x="914400" y="1333500"/>
-            <a:ext cx="16459200" cy="952500"/>
+            <a:ext cx="16459200" cy="1085850"/>
           </a:xfrm>
           <a:prstGeom prst="rect">
             <a:avLst/>
@@ -12324,7 +12258,7 @@
               <a:buNone/>
             </a:pPr>
             <a:r>
-              <a:rPr lang="en-US" sz="4800" dirty="0" spc="-107" kern="0">
+              <a:rPr lang="en-US" sz="6900" dirty="0" spc="-155" kern="0">
                 <a:solidFill>
                   <a:srgbClr val="14161C"/>
                 </a:solidFill>
@@ -12335,7 +12269,7 @@
               <a:t>Tắt</a:t>
             </a:r>
             <a:r>
-              <a:rPr lang="en-US" sz="4800" dirty="0" spc="-2" kern="0">
+              <a:rPr lang="en-US" sz="6900" dirty="0" spc="-2" kern="0">
                 <a:solidFill>
                   <a:srgbClr val="14161C"/>
                 </a:solidFill>
@@ -12343,10 +12277,10 @@
                 <a:ea typeface="Bricolage Grotesque ExtraBold" pitchFamily="34" charset="-122"/>
                 <a:cs typeface="Bricolage Grotesque ExtraBold" pitchFamily="34" charset="-120"/>
               </a:rPr>
-              <a:t> cờ</a:t>
-            </a:r>
-            <a:r>
-              <a:rPr lang="en-US" sz="4800" dirty="0" spc="-1" kern="0">
+              <a:t> cờ có</a:t>
+            </a:r>
+            <a:r>
+              <a:rPr lang="en-US" sz="6900" dirty="0" spc="-69" kern="0">
                 <a:solidFill>
                   <a:srgbClr val="14161C"/>
                 </a:solidFill>
@@ -12354,10 +12288,10 @@
                 <a:ea typeface="Bricolage Grotesque ExtraBold" pitchFamily="34" charset="-122"/>
                 <a:cs typeface="Bricolage Grotesque ExtraBold" pitchFamily="34" charset="-120"/>
               </a:rPr>
-              <a:t> có</a:t>
-            </a:r>
-            <a:r>
-              <a:rPr lang="en-US" sz="4800" dirty="0" spc="-30" kern="0">
+              <a:t> về</a:t>
+            </a:r>
+            <a:r>
+              <a:rPr lang="en-US" sz="6900" dirty="0" spc="0" kern="0">
                 <a:solidFill>
                   <a:srgbClr val="14161C"/>
                 </a:solidFill>
@@ -12365,10 +12299,10 @@
                 <a:ea typeface="Bricolage Grotesque ExtraBold" pitchFamily="34" charset="-122"/>
                 <a:cs typeface="Bricolage Grotesque ExtraBold" pitchFamily="34" charset="-120"/>
               </a:rPr>
-              <a:t> đưa</a:t>
-            </a:r>
-            <a:r>
-              <a:rPr lang="en-US" sz="4800" dirty="0" spc="0" kern="0">
+              <a:t> như</a:t>
+            </a:r>
+            <a:r>
+              <a:rPr lang="en-US" sz="6900" dirty="0" spc="-88" kern="0">
                 <a:solidFill>
                   <a:srgbClr val="14161C"/>
                 </a:solidFill>
@@ -12376,53 +12310,9 @@
                 <a:ea typeface="Bricolage Grotesque ExtraBold" pitchFamily="34" charset="-122"/>
                 <a:cs typeface="Bricolage Grotesque ExtraBold" pitchFamily="34" charset="-120"/>
               </a:rPr>
-              <a:t> hệ</a:t>
-            </a:r>
-            <a:r>
-              <a:rPr lang="en-US" sz="4800" dirty="0" spc="-1" kern="0">
-                <a:solidFill>
-                  <a:srgbClr val="14161C"/>
-                </a:solidFill>
-                <a:latin typeface="Bricolage Grotesque ExtraBold" pitchFamily="34" charset="0"/>
-                <a:ea typeface="Bricolage Grotesque ExtraBold" pitchFamily="34" charset="-122"/>
-                <a:cs typeface="Bricolage Grotesque ExtraBold" pitchFamily="34" charset="-120"/>
-              </a:rPr>
-              <a:t> thống</a:t>
-            </a:r>
-            <a:r>
-              <a:rPr lang="en-US" sz="4800" dirty="0" spc="-50" kern="0">
-                <a:solidFill>
-                  <a:srgbClr val="14161C"/>
-                </a:solidFill>
-                <a:latin typeface="Bricolage Grotesque ExtraBold" pitchFamily="34" charset="0"/>
-                <a:ea typeface="Bricolage Grotesque ExtraBold" pitchFamily="34" charset="-122"/>
-                <a:cs typeface="Bricolage Grotesque ExtraBold" pitchFamily="34" charset="-120"/>
-              </a:rPr>
-              <a:t> về</a:t>
-            </a:r>
-            <a:r>
-              <a:rPr lang="en-US" sz="4800" dirty="0" spc="0" kern="0">
-                <a:solidFill>
-                  <a:srgbClr val="14161C"/>
-                </a:solidFill>
-                <a:latin typeface="Bricolage Grotesque ExtraBold" pitchFamily="34" charset="0"/>
-                <a:ea typeface="Bricolage Grotesque ExtraBold" pitchFamily="34" charset="-122"/>
-                <a:cs typeface="Bricolage Grotesque ExtraBold" pitchFamily="34" charset="-120"/>
-              </a:rPr>
-              <a:t> như</a:t>
-            </a:r>
-            <a:r>
-              <a:rPr lang="en-US" sz="4800" dirty="0" spc="-59" kern="0">
-                <a:solidFill>
-                  <a:srgbClr val="14161C"/>
-                </a:solidFill>
-                <a:latin typeface="Bricolage Grotesque ExtraBold" pitchFamily="34" charset="0"/>
-                <a:ea typeface="Bricolage Grotesque ExtraBold" pitchFamily="34" charset="-122"/>
-                <a:cs typeface="Bricolage Grotesque ExtraBold" pitchFamily="34" charset="-120"/>
-              </a:rPr>
               <a:t> trước?</a:t>
             </a:r>
-            <a:endParaRPr lang="en-US" sz="4800" dirty="0"/>
+            <a:endParaRPr lang="en-US" sz="6900" dirty="0"/>
           </a:p>
         </p:txBody>
       </p:sp>
@@ -13785,7 +13675,7 @@
         <p:spPr>
           <a:xfrm>
             <a:off x="914400" y="1295400"/>
-            <a:ext cx="16459200" cy="952500"/>
+            <a:ext cx="16459200" cy="1085850"/>
           </a:xfrm>
           <a:prstGeom prst="rect">
             <a:avLst/>
@@ -13801,7 +13691,7 @@
               <a:buNone/>
             </a:pPr>
             <a:r>
-              <a:rPr lang="en-US" sz="5100" dirty="0" spc="-2" kern="0">
+              <a:rPr lang="en-US" sz="6900" dirty="0" spc="-2" kern="0">
                 <a:solidFill>
                   <a:srgbClr val="F3EEE3"/>
                 </a:solidFill>
@@ -13812,7 +13702,7 @@
               <a:t>Năm</a:t>
             </a:r>
             <a:r>
-              <a:rPr lang="en-US" sz="5100" dirty="0" spc="3" kern="0">
+              <a:rPr lang="en-US" sz="6900" dirty="0" spc="1" kern="0">
                 <a:solidFill>
                   <a:srgbClr val="F3EEE3"/>
                 </a:solidFill>
@@ -13823,7 +13713,7 @@
               <a:t> thói</a:t>
             </a:r>
             <a:r>
-              <a:rPr lang="en-US" sz="5100" dirty="0" spc="4" kern="0">
+              <a:rPr lang="en-US" sz="6900" dirty="0" spc="6" kern="0">
                 <a:solidFill>
                   <a:srgbClr val="F3EEE3"/>
                 </a:solidFill>
@@ -13834,7 +13724,7 @@
               <a:t> quen</a:t>
             </a:r>
             <a:r>
-              <a:rPr lang="en-US" sz="5100" dirty="0" spc="0" kern="0">
+              <a:rPr lang="en-US" sz="6900" dirty="0" spc="0" kern="0">
                 <a:solidFill>
                   <a:srgbClr val="F3EEE3"/>
                 </a:solidFill>
@@ -13845,7 +13735,7 @@
               <a:t> khi</a:t>
             </a:r>
             <a:r>
-              <a:rPr lang="en-US" sz="5100" dirty="0" spc="1" kern="0">
+              <a:rPr lang="en-US" sz="6900" dirty="0" spc="2" kern="0">
                 <a:solidFill>
                   <a:srgbClr val="F3EEE3"/>
                 </a:solidFill>
@@ -13856,7 +13746,7 @@
               <a:t> dùng</a:t>
             </a:r>
             <a:r>
-              <a:rPr lang="en-US" sz="5100" dirty="0" spc="-3" kern="0">
+              <a:rPr lang="en-US" sz="6900" dirty="0" spc="-2" kern="0">
                 <a:solidFill>
                   <a:srgbClr val="F3EEE3"/>
                 </a:solidFill>
@@ -13866,7 +13756,7 @@
               </a:rPr>
               <a:t> cờ</a:t>
             </a:r>
-            <a:endParaRPr lang="en-US" sz="5100" dirty="0"/>
+            <a:endParaRPr lang="en-US" sz="6900" dirty="0"/>
           </a:p>
         </p:txBody>
       </p:sp>

--- a/system-design-101/vi/lessons/sd-13-015/slides/sd-13-015.pptx
+++ b/system-design-101/vi/lessons/sd-13-015/slides/sd-13-015.pptx
@@ -2175,17 +2175,17 @@
           <a:ln/>
         </p:spPr>
         <p:txBody>
-          <a:bodyPr wrap="square" lIns="0" tIns="16764" rIns="0" bIns="-16764" rtlCol="0" anchor="t"/>
+          <a:bodyPr wrap="square" lIns="0" tIns="17796" rIns="0" bIns="-17796" rtlCol="0" anchor="t"/>
           <a:lstStyle/>
           <a:p>
             <a:pPr algn="ctr" indent="0" marL="0">
               <a:lnSpc>
-                <a:spcPts val="3000"/>
+                <a:spcPts val="3188"/>
               </a:lnSpc>
               <a:buNone/>
             </a:pPr>
             <a:r>
-              <a:rPr lang="en-US" sz="2400" b="1" dirty="0" spc="-2" kern="0">
+              <a:rPr lang="en-US" sz="2550" b="1" dirty="0" spc="-5" kern="0">
                 <a:solidFill>
                   <a:srgbClr val="F3EEE3"/>
                 </a:solidFill>
@@ -2196,7 +2196,7 @@
               <a:t>Mã</a:t>
             </a:r>
             <a:r>
-              <a:rPr lang="en-US" sz="2400" b="1" dirty="0" spc="-5" kern="0">
+              <a:rPr lang="en-US" sz="2550" b="1" dirty="0" spc="-8" kern="0">
                 <a:solidFill>
                   <a:srgbClr val="F3EEE3"/>
                 </a:solidFill>
@@ -2207,7 +2207,7 @@
               <a:t> lên,</a:t>
             </a:r>
             <a:r>
-              <a:rPr lang="en-US" sz="2400" b="1" dirty="0" spc="-4" kern="0">
+              <a:rPr lang="en-US" sz="2550" b="1" dirty="0" spc="-3" kern="0">
                 <a:solidFill>
                   <a:srgbClr val="F3EEE3"/>
                 </a:solidFill>
@@ -2218,7 +2218,7 @@
               <a:t> cờ</a:t>
             </a:r>
             <a:r>
-              <a:rPr lang="en-US" sz="2400" b="1" dirty="0" spc="-7" kern="0">
+              <a:rPr lang="en-US" sz="2550" b="1" dirty="0" spc="-7" kern="0">
                 <a:solidFill>
                   <a:srgbClr val="F3EEE3"/>
                 </a:solidFill>
@@ -2228,7 +2228,7 @@
               </a:rPr>
               <a:t> tắt</a:t>
             </a:r>
-            <a:endParaRPr lang="en-US" sz="2400" dirty="0"/>
+            <a:endParaRPr lang="en-US" sz="2550" dirty="0"/>
           </a:p>
         </p:txBody>
       </p:sp>
@@ -2296,17 +2296,17 @@
           <a:ln/>
         </p:spPr>
         <p:txBody>
-          <a:bodyPr wrap="square" lIns="0" tIns="16764" rIns="0" bIns="-16764" rtlCol="0" anchor="t"/>
+          <a:bodyPr wrap="square" lIns="0" tIns="17796" rIns="0" bIns="-17796" rtlCol="0" anchor="t"/>
           <a:lstStyle/>
           <a:p>
             <a:pPr algn="ctr" indent="0" marL="0">
               <a:lnSpc>
-                <a:spcPts val="3000"/>
+                <a:spcPts val="3188"/>
               </a:lnSpc>
               <a:buNone/>
             </a:pPr>
             <a:r>
-              <a:rPr lang="en-US" sz="2400" b="1" dirty="0" spc="-1" kern="0">
+              <a:rPr lang="en-US" sz="2550" b="1" dirty="0" spc="-2" kern="0">
                 <a:solidFill>
                   <a:srgbClr val="F3EEE3"/>
                 </a:solidFill>
@@ -2314,31 +2314,9 @@
                 <a:ea typeface="Be Vietnam Pro" pitchFamily="34" charset="-122"/>
                 <a:cs typeface="Be Vietnam Pro" pitchFamily="34" charset="-120"/>
               </a:rPr>
-              <a:t>Thử</a:t>
-            </a:r>
-            <a:r>
-              <a:rPr lang="en-US" sz="2400" b="1" dirty="0" spc="-3" kern="0">
-                <a:solidFill>
-                  <a:srgbClr val="F3EEE3"/>
-                </a:solidFill>
-                <a:latin typeface="Be Vietnam Pro" pitchFamily="34" charset="0"/>
-                <a:ea typeface="Be Vietnam Pro" pitchFamily="34" charset="-122"/>
-                <a:cs typeface="Be Vietnam Pro" pitchFamily="34" charset="-120"/>
-              </a:rPr>
-              <a:t> nội</a:t>
-            </a:r>
-            <a:r>
-              <a:rPr lang="en-US" sz="2400" b="1" dirty="0" spc="-1" kern="0">
-                <a:solidFill>
-                  <a:srgbClr val="F3EEE3"/>
-                </a:solidFill>
-                <a:latin typeface="Be Vietnam Pro" pitchFamily="34" charset="0"/>
-                <a:ea typeface="Be Vietnam Pro" pitchFamily="34" charset="-122"/>
-                <a:cs typeface="Be Vietnam Pro" pitchFamily="34" charset="-120"/>
-              </a:rPr>
-              <a:t> bộ</a:t>
-            </a:r>
-            <a:endParaRPr lang="en-US" sz="2400" dirty="0"/>
+              <a:t>Thử nội bộ</a:t>
+            </a:r>
+            <a:endParaRPr lang="en-US" sz="2550" dirty="0"/>
           </a:p>
         </p:txBody>
       </p:sp>
@@ -2406,17 +2384,17 @@
           <a:ln/>
         </p:spPr>
         <p:txBody>
-          <a:bodyPr wrap="square" lIns="0" tIns="16764" rIns="0" bIns="-16764" rtlCol="0" anchor="t"/>
+          <a:bodyPr wrap="square" lIns="0" tIns="17796" rIns="0" bIns="-17796" rtlCol="0" anchor="t"/>
           <a:lstStyle/>
           <a:p>
             <a:pPr algn="ctr" indent="0" marL="0">
               <a:lnSpc>
-                <a:spcPts val="3000"/>
+                <a:spcPts val="3188"/>
               </a:lnSpc>
               <a:buNone/>
             </a:pPr>
             <a:r>
-              <a:rPr lang="en-US" sz="2400" b="1" dirty="0" spc="-2" kern="0">
+              <a:rPr lang="en-US" sz="2550" b="1" dirty="0" spc="-5" kern="0">
                 <a:solidFill>
                   <a:srgbClr val="F3EEE3"/>
                 </a:solidFill>
@@ -2427,7 +2405,7 @@
               <a:t>Mở</a:t>
             </a:r>
             <a:r>
-              <a:rPr lang="en-US" sz="2400" b="1" dirty="0" spc="0" kern="0">
+              <a:rPr lang="en-US" sz="2550" b="1" dirty="0" spc="-1" kern="0">
                 <a:solidFill>
                   <a:srgbClr val="F3EEE3"/>
                 </a:solidFill>
@@ -2437,7 +2415,7 @@
               </a:rPr>
               <a:t> dần</a:t>
             </a:r>
-            <a:endParaRPr lang="en-US" sz="2400" dirty="0"/>
+            <a:endParaRPr lang="en-US" sz="2550" dirty="0"/>
           </a:p>
         </p:txBody>
       </p:sp>
@@ -2505,17 +2483,17 @@
           <a:ln/>
         </p:spPr>
         <p:txBody>
-          <a:bodyPr wrap="square" lIns="0" tIns="16764" rIns="0" bIns="-16764" rtlCol="0" anchor="t"/>
+          <a:bodyPr wrap="square" lIns="0" tIns="17796" rIns="0" bIns="-17796" rtlCol="0" anchor="t"/>
           <a:lstStyle/>
           <a:p>
             <a:pPr algn="ctr" indent="0" marL="0">
               <a:lnSpc>
-                <a:spcPts val="3000"/>
+                <a:spcPts val="3188"/>
               </a:lnSpc>
               <a:buNone/>
             </a:pPr>
             <a:r>
-              <a:rPr lang="en-US" sz="2400" b="1" dirty="0" spc="-2" kern="0">
+              <a:rPr lang="en-US" sz="2550" b="1" dirty="0" spc="-5" kern="0">
                 <a:solidFill>
                   <a:srgbClr val="F3EEE3"/>
                 </a:solidFill>
@@ -2526,7 +2504,7 @@
               <a:t>Mở</a:t>
             </a:r>
             <a:r>
-              <a:rPr lang="en-US" sz="2400" b="1" dirty="0" spc="-11" kern="0">
+              <a:rPr lang="en-US" sz="2550" b="1" dirty="0" spc="-9" kern="0">
                 <a:solidFill>
                   <a:srgbClr val="F3EEE3"/>
                 </a:solidFill>
@@ -2536,7 +2514,7 @@
               </a:rPr>
               <a:t> hết</a:t>
             </a:r>
-            <a:endParaRPr lang="en-US" sz="2400" dirty="0"/>
+            <a:endParaRPr lang="en-US" sz="2550" dirty="0"/>
           </a:p>
         </p:txBody>
       </p:sp>
@@ -2604,17 +2582,17 @@
           <a:ln/>
         </p:spPr>
         <p:txBody>
-          <a:bodyPr wrap="square" lIns="0" tIns="16764" rIns="0" bIns="-16764" rtlCol="0" anchor="t"/>
+          <a:bodyPr wrap="square" lIns="0" tIns="17796" rIns="0" bIns="-17796" rtlCol="0" anchor="t"/>
           <a:lstStyle/>
           <a:p>
             <a:pPr algn="ctr" indent="0" marL="0">
               <a:lnSpc>
-                <a:spcPts val="3000"/>
+                <a:spcPts val="3188"/>
               </a:lnSpc>
               <a:buNone/>
             </a:pPr>
             <a:r>
-              <a:rPr lang="en-US" sz="2400" b="1" dirty="0" spc="-3" kern="0">
+              <a:rPr lang="en-US" sz="2550" b="1" dirty="0" spc="-3" kern="0">
                 <a:solidFill>
                   <a:srgbClr val="F3EEE3"/>
                 </a:solidFill>
@@ -2622,20 +2600,9 @@
                 <a:ea typeface="Be Vietnam Pro" pitchFamily="34" charset="-122"/>
                 <a:cs typeface="Be Vietnam Pro" pitchFamily="34" charset="-120"/>
               </a:rPr>
-              <a:t>Dọn</a:t>
-            </a:r>
-            <a:r>
-              <a:rPr lang="en-US" sz="2400" b="1" dirty="0" spc="-4" kern="0">
-                <a:solidFill>
-                  <a:srgbClr val="F3EEE3"/>
-                </a:solidFill>
-                <a:latin typeface="Be Vietnam Pro" pitchFamily="34" charset="0"/>
-                <a:ea typeface="Be Vietnam Pro" pitchFamily="34" charset="-122"/>
-                <a:cs typeface="Be Vietnam Pro" pitchFamily="34" charset="-120"/>
-              </a:rPr>
-              <a:t> cờ</a:t>
-            </a:r>
-            <a:endParaRPr lang="en-US" sz="2400" dirty="0"/>
+              <a:t>Dọn cờ</a:t>
+            </a:r>
+            <a:endParaRPr lang="en-US" sz="2550" dirty="0"/>
           </a:p>
         </p:txBody>
       </p:sp>
@@ -5343,17 +5310,17 @@
           <a:ln/>
         </p:spPr>
         <p:txBody>
-          <a:bodyPr wrap="square" lIns="0" tIns="12144" rIns="0" bIns="-12144" rtlCol="0" anchor="t"/>
+          <a:bodyPr wrap="square" lIns="0" tIns="13764" rIns="0" bIns="-13764" rtlCol="0" anchor="t"/>
           <a:lstStyle/>
           <a:p>
             <a:pPr algn="l" indent="0" marL="0">
               <a:lnSpc>
-                <a:spcPts val="2925"/>
+                <a:spcPts val="3315"/>
               </a:lnSpc>
               <a:buNone/>
             </a:pPr>
             <a:r>
-              <a:rPr lang="en-US" sz="2250" b="1" dirty="0" spc="10" kern="0">
+              <a:rPr lang="en-US" sz="2550" b="1" dirty="0" spc="14" kern="0">
                 <a:solidFill>
                   <a:srgbClr val="14161C"/>
                 </a:solidFill>
@@ -5364,7 +5331,7 @@
               <a:t>Người</a:t>
             </a:r>
             <a:r>
-              <a:rPr lang="en-US" sz="2250" b="1" dirty="0" spc="-2" kern="0">
+              <a:rPr lang="en-US" sz="2550" b="1" dirty="0" spc="-3" kern="0">
                 <a:solidFill>
                   <a:srgbClr val="14161C"/>
                 </a:solidFill>
@@ -5374,7 +5341,7 @@
               </a:rPr>
               <a:t> dùng</a:t>
             </a:r>
-            <a:endParaRPr lang="en-US" sz="2250" dirty="0"/>
+            <a:endParaRPr lang="en-US" sz="2550" dirty="0"/>
           </a:p>
         </p:txBody>
       </p:sp>
@@ -5396,17 +5363,17 @@
           <a:ln/>
         </p:spPr>
         <p:txBody>
-          <a:bodyPr wrap="square" lIns="0" tIns="12144" rIns="0" bIns="-12144" rtlCol="0" anchor="t"/>
+          <a:bodyPr wrap="square" lIns="0" tIns="13764" rIns="0" bIns="-13764" rtlCol="0" anchor="t"/>
           <a:lstStyle/>
           <a:p>
             <a:pPr algn="l" indent="0" marL="0">
               <a:lnSpc>
-                <a:spcPts val="2925"/>
+                <a:spcPts val="3315"/>
               </a:lnSpc>
               <a:buNone/>
             </a:pPr>
             <a:r>
-              <a:rPr lang="en-US" sz="2250" b="1" dirty="0" spc="-1" kern="0">
+              <a:rPr lang="en-US" sz="2550" b="1" dirty="0" spc="-2" kern="0">
                 <a:solidFill>
                   <a:srgbClr val="14161C"/>
                 </a:solidFill>
@@ -5417,7 +5384,7 @@
               <a:t>Nhân viên,</a:t>
             </a:r>
             <a:r>
-              <a:rPr lang="en-US" sz="2250" b="1" dirty="0" spc="0" kern="0">
+              <a:rPr lang="en-US" sz="2550" b="1" dirty="0" spc="0" kern="0">
                 <a:solidFill>
                   <a:srgbClr val="14161C"/>
                 </a:solidFill>
@@ -5425,10 +5392,10 @@
                 <a:ea typeface="Be Vietnam Pro" pitchFamily="34" charset="-122"/>
                 <a:cs typeface="Be Vietnam Pro" pitchFamily="34" charset="-120"/>
               </a:rPr>
-              <a:t> tài khoản</a:t>
-            </a:r>
-            <a:r>
-              <a:rPr lang="en-US" sz="2250" b="1" dirty="0" spc="2" kern="0">
+              <a:t> tài</a:t>
+            </a:r>
+            <a:r>
+              <a:rPr lang="en-US" sz="2550" b="1" dirty="0" spc="-2" kern="0">
                 <a:solidFill>
                   <a:srgbClr val="14161C"/>
                 </a:solidFill>
@@ -5436,9 +5403,20 @@
                 <a:ea typeface="Be Vietnam Pro" pitchFamily="34" charset="-122"/>
                 <a:cs typeface="Be Vietnam Pro" pitchFamily="34" charset="-120"/>
               </a:rPr>
+              <a:t> khoản</a:t>
+            </a:r>
+            <a:r>
+              <a:rPr lang="en-US" sz="2550" b="1" dirty="0" spc="-1" kern="0">
+                <a:solidFill>
+                  <a:srgbClr val="14161C"/>
+                </a:solidFill>
+                <a:latin typeface="Be Vietnam Pro" pitchFamily="34" charset="0"/>
+                <a:ea typeface="Be Vietnam Pro" pitchFamily="34" charset="-122"/>
+                <a:cs typeface="Be Vietnam Pro" pitchFamily="34" charset="-120"/>
+              </a:rPr>
               <a:t> thử</a:t>
             </a:r>
-            <a:endParaRPr lang="en-US" sz="2250" dirty="0"/>
+            <a:endParaRPr lang="en-US" sz="2550" dirty="0"/>
           </a:p>
         </p:txBody>
       </p:sp>
@@ -5559,17 +5537,17 @@
           <a:ln/>
         </p:spPr>
         <p:txBody>
-          <a:bodyPr wrap="square" lIns="0" tIns="9144" rIns="0" bIns="-9144" rtlCol="0" anchor="t"/>
+          <a:bodyPr wrap="square" lIns="0" tIns="9700" rIns="0" bIns="-9700" rtlCol="0" anchor="t"/>
           <a:lstStyle/>
           <a:p>
             <a:pPr algn="l" indent="0" marL="0">
               <a:lnSpc>
-                <a:spcPts val="3240"/>
+                <a:spcPts val="3443"/>
               </a:lnSpc>
               <a:buNone/>
             </a:pPr>
             <a:r>
-              <a:rPr lang="en-US" sz="2400" dirty="0" spc="1" kern="0">
+              <a:rPr lang="en-US" sz="2550" dirty="0" spc="-1" kern="0">
                 <a:solidFill>
                   <a:srgbClr val="14161C"/>
                 </a:solidFill>
@@ -5580,7 +5558,7 @@
               <a:t>Hành</a:t>
             </a:r>
             <a:r>
-              <a:rPr lang="en-US" sz="2400" dirty="0" spc="-2" kern="0">
+              <a:rPr lang="en-US" sz="2550" dirty="0" spc="-3" kern="0">
                 <a:solidFill>
                   <a:srgbClr val="14161C"/>
                 </a:solidFill>
@@ -5591,7 +5569,7 @@
               <a:t> vi</a:t>
             </a:r>
             <a:r>
-              <a:rPr lang="en-US" sz="2400" dirty="0" spc="2" kern="0">
+              <a:rPr lang="en-US" sz="2550" dirty="0" spc="0" kern="0">
                 <a:solidFill>
                   <a:srgbClr val="14161C"/>
                 </a:solidFill>
@@ -5599,10 +5577,10 @@
                 <a:ea typeface="Be Vietnam Pro" pitchFamily="34" charset="-122"/>
                 <a:cs typeface="Be Vietnam Pro" pitchFamily="34" charset="-120"/>
               </a:rPr>
-              <a:t> mới</a:t>
-            </a:r>
-            <a:r>
-              <a:rPr lang="en-US" sz="2400" dirty="0" spc="3" kern="0">
+              <a:t> mới nằm</a:t>
+            </a:r>
+            <a:r>
+              <a:rPr lang="en-US" sz="2550" dirty="0" spc="-6" kern="0">
                 <a:solidFill>
                   <a:srgbClr val="14161C"/>
                 </a:solidFill>
@@ -5610,10 +5588,10 @@
                 <a:ea typeface="Be Vietnam Pro" pitchFamily="34" charset="-122"/>
                 <a:cs typeface="Be Vietnam Pro" pitchFamily="34" charset="-120"/>
               </a:rPr>
-              <a:t> nằm</a:t>
-            </a:r>
-            <a:r>
-              <a:rPr lang="en-US" sz="2400" dirty="0" spc="-7" kern="0">
+              <a:t> sau</a:t>
+            </a:r>
+            <a:r>
+              <a:rPr lang="en-US" sz="2550" dirty="0" spc="-1" kern="0">
                 <a:solidFill>
                   <a:srgbClr val="14161C"/>
                 </a:solidFill>
@@ -5621,10 +5599,10 @@
                 <a:ea typeface="Be Vietnam Pro" pitchFamily="34" charset="-122"/>
                 <a:cs typeface="Be Vietnam Pro" pitchFamily="34" charset="-120"/>
               </a:rPr>
-              <a:t> sau</a:t>
-            </a:r>
-            <a:r>
-              <a:rPr lang="en-US" sz="2400" dirty="0" spc="0" kern="0">
+              <a:t> cờ;</a:t>
+            </a:r>
+            <a:r>
+              <a:rPr lang="en-US" sz="2550" dirty="0" spc="6" kern="0">
                 <a:solidFill>
                   <a:srgbClr val="14161C"/>
                 </a:solidFill>
@@ -5632,10 +5610,10 @@
                 <a:ea typeface="Be Vietnam Pro" pitchFamily="34" charset="-122"/>
                 <a:cs typeface="Be Vietnam Pro" pitchFamily="34" charset="-120"/>
               </a:rPr>
-              <a:t> cờ;</a:t>
-            </a:r>
-            <a:r>
-              <a:rPr lang="en-US" sz="2400" dirty="0" spc="7" kern="0">
+              <a:t> chưa</a:t>
+            </a:r>
+            <a:r>
+              <a:rPr lang="en-US" sz="2550" dirty="0" spc="-6" kern="0">
                 <a:solidFill>
                   <a:srgbClr val="14161C"/>
                 </a:solidFill>
@@ -5643,10 +5621,10 @@
                 <a:ea typeface="Be Vietnam Pro" pitchFamily="34" charset="-122"/>
                 <a:cs typeface="Be Vietnam Pro" pitchFamily="34" charset="-120"/>
               </a:rPr>
-              <a:t> chưa</a:t>
-            </a:r>
-            <a:r>
-              <a:rPr lang="en-US" sz="2400" dirty="0" spc="-6" kern="0">
+              <a:t> thấy</a:t>
+            </a:r>
+            <a:r>
+              <a:rPr lang="en-US" sz="2550" dirty="0" spc="1" kern="0">
                 <a:solidFill>
                   <a:srgbClr val="14161C"/>
                 </a:solidFill>
@@ -5654,10 +5632,10 @@
                 <a:ea typeface="Be Vietnam Pro" pitchFamily="34" charset="-122"/>
                 <a:cs typeface="Be Vietnam Pro" pitchFamily="34" charset="-120"/>
               </a:rPr>
-              <a:t> thấy</a:t>
-            </a:r>
-            <a:r>
-              <a:rPr lang="en-US" sz="2400" dirty="0" spc="2" kern="0">
+              <a:t> gì</a:t>
+            </a:r>
+            <a:r>
+              <a:rPr lang="en-US" sz="2550" dirty="0" spc="11" kern="0">
                 <a:solidFill>
                   <a:srgbClr val="14161C"/>
                 </a:solidFill>
@@ -5665,20 +5643,9 @@
                 <a:ea typeface="Be Vietnam Pro" pitchFamily="34" charset="-122"/>
                 <a:cs typeface="Be Vietnam Pro" pitchFamily="34" charset="-120"/>
               </a:rPr>
-              <a:t> gì</a:t>
-            </a:r>
-            <a:r>
-              <a:rPr lang="en-US" sz="2400" dirty="0" spc="10" kern="0">
-                <a:solidFill>
-                  <a:srgbClr val="14161C"/>
-                </a:solidFill>
-                <a:latin typeface="Be Vietnam Pro" pitchFamily="34" charset="0"/>
-                <a:ea typeface="Be Vietnam Pro" pitchFamily="34" charset="-122"/>
-                <a:cs typeface="Be Vietnam Pro" pitchFamily="34" charset="-120"/>
-              </a:rPr>
               <a:t> đổi.</a:t>
             </a:r>
-            <a:endParaRPr lang="en-US" sz="2400" dirty="0"/>
+            <a:endParaRPr lang="en-US" sz="2550" dirty="0"/>
           </a:p>
         </p:txBody>
       </p:sp>
@@ -5777,17 +5744,17 @@
           <a:ln/>
         </p:spPr>
         <p:txBody>
-          <a:bodyPr wrap="square" lIns="0" tIns="9144" rIns="0" bIns="-9144" rtlCol="0" anchor="t"/>
+          <a:bodyPr wrap="square" lIns="0" tIns="9700" rIns="0" bIns="-9700" rtlCol="0" anchor="t"/>
           <a:lstStyle/>
           <a:p>
             <a:pPr algn="l" indent="0" marL="0">
               <a:lnSpc>
-                <a:spcPts val="3240"/>
+                <a:spcPts val="3443"/>
               </a:lnSpc>
               <a:buNone/>
             </a:pPr>
             <a:r>
-              <a:rPr lang="en-US" sz="2400" dirty="0" spc="8" kern="0">
+              <a:rPr lang="en-US" sz="2550" dirty="0" spc="8" kern="0">
                 <a:solidFill>
                   <a:srgbClr val="14161C"/>
                 </a:solidFill>
@@ -5798,7 +5765,7 @@
               <a:t>Chưa</a:t>
             </a:r>
             <a:r>
-              <a:rPr lang="en-US" sz="2400" dirty="0" spc="12" kern="0">
+              <a:rPr lang="en-US" sz="2550" dirty="0" spc="13" kern="0">
                 <a:solidFill>
                   <a:srgbClr val="14161C"/>
                 </a:solidFill>
@@ -5809,7 +5776,7 @@
               <a:t> đến</a:t>
             </a:r>
             <a:r>
-              <a:rPr lang="en-US" sz="2400" dirty="0" spc="8" kern="0">
+              <a:rPr lang="en-US" sz="2550" dirty="0" spc="7" kern="0">
                 <a:solidFill>
                   <a:srgbClr val="14161C"/>
                 </a:solidFill>
@@ -5820,7 +5787,7 @@
               <a:t> lượt</a:t>
             </a:r>
             <a:r>
-              <a:rPr lang="en-US" sz="2400" dirty="0" spc="6" kern="0">
+              <a:rPr lang="en-US" sz="2550" dirty="0" spc="5" kern="0">
                 <a:solidFill>
                   <a:srgbClr val="14161C"/>
                 </a:solidFill>
@@ -5831,7 +5798,7 @@
               <a:t> người</a:t>
             </a:r>
             <a:r>
-              <a:rPr lang="en-US" sz="2400" dirty="0" spc="2" kern="0">
+              <a:rPr lang="en-US" sz="2550" dirty="0" spc="0" kern="0">
                 <a:solidFill>
                   <a:srgbClr val="14161C"/>
                 </a:solidFill>
@@ -5841,7 +5808,7 @@
               </a:rPr>
               <a:t> dùng.</a:t>
             </a:r>
-            <a:endParaRPr lang="en-US" sz="2400" dirty="0"/>
+            <a:endParaRPr lang="en-US" sz="2550" dirty="0"/>
           </a:p>
         </p:txBody>
       </p:sp>
@@ -5973,17 +5940,17 @@
           <a:ln/>
         </p:spPr>
         <p:txBody>
-          <a:bodyPr wrap="square" lIns="0" tIns="9144" rIns="0" bIns="-9144" rtlCol="0" anchor="t"/>
+          <a:bodyPr wrap="square" lIns="0" tIns="9700" rIns="0" bIns="-9700" rtlCol="0" anchor="t"/>
           <a:lstStyle/>
           <a:p>
             <a:pPr algn="l" indent="0" marL="0">
               <a:lnSpc>
-                <a:spcPts val="3240"/>
+                <a:spcPts val="3443"/>
               </a:lnSpc>
               <a:buNone/>
             </a:pPr>
             <a:r>
-              <a:rPr lang="en-US" sz="2400" dirty="0" spc="1" kern="0">
+              <a:rPr lang="en-US" sz="2550" dirty="0" spc="-1" kern="0">
                 <a:solidFill>
                   <a:srgbClr val="14161C"/>
                 </a:solidFill>
@@ -5991,10 +5958,10 @@
                 <a:ea typeface="Be Vietnam Pro" pitchFamily="34" charset="-122"/>
                 <a:cs typeface="Be Vietnam Pro" pitchFamily="34" charset="-120"/>
               </a:rPr>
-              <a:t>Kiểm</a:t>
-            </a:r>
-            <a:r>
-              <a:rPr lang="en-US" sz="2400" dirty="0" spc="3" kern="0">
+              <a:t>Kiểm thử</a:t>
+            </a:r>
+            <a:r>
+              <a:rPr lang="en-US" sz="2550" dirty="0" spc="0" kern="0">
                 <a:solidFill>
                   <a:srgbClr val="14161C"/>
                 </a:solidFill>
@@ -6002,10 +5969,10 @@
                 <a:ea typeface="Be Vietnam Pro" pitchFamily="34" charset="-122"/>
                 <a:cs typeface="Be Vietnam Pro" pitchFamily="34" charset="-120"/>
               </a:rPr>
-              <a:t> thử</a:t>
-            </a:r>
-            <a:r>
-              <a:rPr lang="en-US" sz="2400" dirty="0" spc="-2" kern="0">
+              <a:t> khi cờ</a:t>
+            </a:r>
+            <a:r>
+              <a:rPr lang="en-US" sz="2550" dirty="0" spc="-18" kern="0">
                 <a:solidFill>
                   <a:srgbClr val="14161C"/>
                 </a:solidFill>
@@ -6013,31 +5980,9 @@
                 <a:ea typeface="Be Vietnam Pro" pitchFamily="34" charset="-122"/>
                 <a:cs typeface="Be Vietnam Pro" pitchFamily="34" charset="-120"/>
               </a:rPr>
-              <a:t> khi</a:t>
-            </a:r>
-            <a:r>
-              <a:rPr lang="en-US" sz="2400" dirty="0" spc="0" kern="0">
-                <a:solidFill>
-                  <a:srgbClr val="14161C"/>
-                </a:solidFill>
-                <a:latin typeface="Be Vietnam Pro" pitchFamily="34" charset="0"/>
-                <a:ea typeface="Be Vietnam Pro" pitchFamily="34" charset="-122"/>
-                <a:cs typeface="Be Vietnam Pro" pitchFamily="34" charset="-120"/>
-              </a:rPr>
-              <a:t> cờ</a:t>
-            </a:r>
-            <a:r>
-              <a:rPr lang="en-US" sz="2400" dirty="0" spc="-17" kern="0">
-                <a:solidFill>
-                  <a:srgbClr val="14161C"/>
-                </a:solidFill>
-                <a:latin typeface="Be Vietnam Pro" pitchFamily="34" charset="0"/>
-                <a:ea typeface="Be Vietnam Pro" pitchFamily="34" charset="-122"/>
-                <a:cs typeface="Be Vietnam Pro" pitchFamily="34" charset="-120"/>
-              </a:rPr>
               <a:t> tắt.</a:t>
             </a:r>
-            <a:endParaRPr lang="en-US" sz="2400" dirty="0"/>
+            <a:endParaRPr lang="en-US" sz="2550" dirty="0"/>
           </a:p>
         </p:txBody>
       </p:sp>
@@ -6169,17 +6114,17 @@
           <a:ln/>
         </p:spPr>
         <p:txBody>
-          <a:bodyPr wrap="square" lIns="0" tIns="9144" rIns="0" bIns="-9144" rtlCol="0" anchor="t"/>
+          <a:bodyPr wrap="square" lIns="0" tIns="9700" rIns="0" bIns="-9700" rtlCol="0" anchor="t"/>
           <a:lstStyle/>
           <a:p>
             <a:pPr algn="l" indent="0" marL="0">
               <a:lnSpc>
-                <a:spcPts val="3240"/>
+                <a:spcPts val="3443"/>
               </a:lnSpc>
               <a:buNone/>
             </a:pPr>
             <a:r>
-              <a:rPr lang="en-US" sz="2400" dirty="0" spc="1" kern="0">
+              <a:rPr lang="en-US" sz="2550" dirty="0" spc="-1" kern="0">
                 <a:solidFill>
                   <a:srgbClr val="14161C"/>
                 </a:solidFill>
@@ -6187,10 +6132,10 @@
                 <a:ea typeface="Be Vietnam Pro" pitchFamily="34" charset="-122"/>
                 <a:cs typeface="Be Vietnam Pro" pitchFamily="34" charset="-120"/>
               </a:rPr>
-              <a:t>Kiểm</a:t>
-            </a:r>
-            <a:r>
-              <a:rPr lang="en-US" sz="2400" dirty="0" spc="3" kern="0">
+              <a:t>Kiểm thử</a:t>
+            </a:r>
+            <a:r>
+              <a:rPr lang="en-US" sz="2550" dirty="0" spc="0" kern="0">
                 <a:solidFill>
                   <a:srgbClr val="14161C"/>
                 </a:solidFill>
@@ -6198,10 +6143,10 @@
                 <a:ea typeface="Be Vietnam Pro" pitchFamily="34" charset="-122"/>
                 <a:cs typeface="Be Vietnam Pro" pitchFamily="34" charset="-120"/>
               </a:rPr>
-              <a:t> thử</a:t>
-            </a:r>
-            <a:r>
-              <a:rPr lang="en-US" sz="2400" dirty="0" spc="-2" kern="0">
+              <a:t> khi cờ</a:t>
+            </a:r>
+            <a:r>
+              <a:rPr lang="en-US" sz="2550" dirty="0" spc="-11" kern="0">
                 <a:solidFill>
                   <a:srgbClr val="14161C"/>
                 </a:solidFill>
@@ -6209,31 +6154,9 @@
                 <a:ea typeface="Be Vietnam Pro" pitchFamily="34" charset="-122"/>
                 <a:cs typeface="Be Vietnam Pro" pitchFamily="34" charset="-120"/>
               </a:rPr>
-              <a:t> khi</a:t>
-            </a:r>
-            <a:r>
-              <a:rPr lang="en-US" sz="2400" dirty="0" spc="0" kern="0">
-                <a:solidFill>
-                  <a:srgbClr val="14161C"/>
-                </a:solidFill>
-                <a:latin typeface="Be Vietnam Pro" pitchFamily="34" charset="0"/>
-                <a:ea typeface="Be Vietnam Pro" pitchFamily="34" charset="-122"/>
-                <a:cs typeface="Be Vietnam Pro" pitchFamily="34" charset="-120"/>
-              </a:rPr>
-              <a:t> cờ</a:t>
-            </a:r>
-            <a:r>
-              <a:rPr lang="en-US" sz="2400" dirty="0" spc="-10" kern="0">
-                <a:solidFill>
-                  <a:srgbClr val="14161C"/>
-                </a:solidFill>
-                <a:latin typeface="Be Vietnam Pro" pitchFamily="34" charset="0"/>
-                <a:ea typeface="Be Vietnam Pro" pitchFamily="34" charset="-122"/>
-                <a:cs typeface="Be Vietnam Pro" pitchFamily="34" charset="-120"/>
-              </a:rPr>
               <a:t> bật.</a:t>
             </a:r>
-            <a:endParaRPr lang="en-US" sz="2400" dirty="0"/>
+            <a:endParaRPr lang="en-US" sz="2550" dirty="0"/>
           </a:p>
         </p:txBody>
       </p:sp>
@@ -6940,17 +6863,17 @@
           <a:ln/>
         </p:spPr>
         <p:txBody>
-          <a:bodyPr wrap="square" lIns="0" tIns="12954" rIns="0" bIns="-12954" rtlCol="0" anchor="t"/>
+          <a:bodyPr wrap="square" lIns="0" tIns="13764" rIns="0" bIns="-13764" rtlCol="0" anchor="t"/>
           <a:lstStyle/>
           <a:p>
             <a:pPr algn="l" indent="0" marL="0">
               <a:lnSpc>
-                <a:spcPts val="3120"/>
+                <a:spcPts val="3315"/>
               </a:lnSpc>
               <a:buNone/>
             </a:pPr>
             <a:r>
-              <a:rPr lang="en-US" sz="2400" b="1" dirty="0" spc="-4" kern="0">
+              <a:rPr lang="en-US" sz="2550" b="1" dirty="0" spc="-6" kern="0">
                 <a:solidFill>
                   <a:srgbClr val="F3EEE3"/>
                 </a:solidFill>
@@ -6958,10 +6881,10 @@
                 <a:ea typeface="Be Vietnam Pro" pitchFamily="34" charset="-122"/>
                 <a:cs typeface="Be Vietnam Pro" pitchFamily="34" charset="-120"/>
               </a:rPr>
-              <a:t>Bật cho</a:t>
-            </a:r>
-            <a:r>
-              <a:rPr lang="en-US" sz="2400" b="1" dirty="0" spc="-7" kern="0">
+              <a:t>Bật</a:t>
+            </a:r>
+            <a:r>
+              <a:rPr lang="en-US" sz="2550" b="1" dirty="0" spc="-2" kern="0">
                 <a:solidFill>
                   <a:srgbClr val="F3EEE3"/>
                 </a:solidFill>
@@ -6969,10 +6892,21 @@
                 <a:ea typeface="Be Vietnam Pro" pitchFamily="34" charset="-122"/>
                 <a:cs typeface="Be Vietnam Pro" pitchFamily="34" charset="-120"/>
               </a:rPr>
+              <a:t> cho</a:t>
+            </a:r>
+            <a:r>
+              <a:rPr lang="en-US" sz="2550" b="1" dirty="0" spc="-9" kern="0">
+                <a:solidFill>
+                  <a:srgbClr val="F3EEE3"/>
+                </a:solidFill>
+                <a:latin typeface="Be Vietnam Pro" pitchFamily="34" charset="0"/>
+                <a:ea typeface="Be Vietnam Pro" pitchFamily="34" charset="-122"/>
+                <a:cs typeface="Be Vietnam Pro" pitchFamily="34" charset="-120"/>
+              </a:rPr>
               <a:t> một</a:t>
             </a:r>
             <a:r>
-              <a:rPr lang="en-US" sz="2400" b="1" dirty="0" spc="-4" kern="0">
+              <a:rPr lang="en-US" sz="2550" b="1" dirty="0" spc="-4" kern="0">
                 <a:solidFill>
                   <a:srgbClr val="F3EEE3"/>
                 </a:solidFill>
@@ -6983,7 +6917,7 @@
               <a:t> phần</a:t>
             </a:r>
             <a:r>
-              <a:rPr lang="en-US" sz="2400" b="1" dirty="0" spc="8" kern="0">
+              <a:rPr lang="en-US" sz="2550" b="1" dirty="0" spc="12" kern="0">
                 <a:solidFill>
                   <a:srgbClr val="F3EEE3"/>
                 </a:solidFill>
@@ -6994,7 +6928,7 @@
               <a:t> người</a:t>
             </a:r>
             <a:r>
-              <a:rPr lang="en-US" sz="2400" b="1" dirty="0" spc="-2" kern="0">
+              <a:rPr lang="en-US" sz="2550" b="1" dirty="0" spc="-3" kern="0">
                 <a:solidFill>
                   <a:srgbClr val="F3EEE3"/>
                 </a:solidFill>
@@ -7004,7 +6938,7 @@
               </a:rPr>
               <a:t> dùng</a:t>
             </a:r>
-            <a:endParaRPr lang="en-US" sz="2400" dirty="0"/>
+            <a:endParaRPr lang="en-US" sz="2550" dirty="0"/>
           </a:p>
         </p:txBody>
       </p:sp>
@@ -7117,17 +7051,17 @@
           <a:ln/>
         </p:spPr>
         <p:txBody>
-          <a:bodyPr wrap="square" lIns="0" tIns="12954" rIns="0" bIns="-12954" rtlCol="0" anchor="t"/>
+          <a:bodyPr wrap="square" lIns="0" tIns="13764" rIns="0" bIns="-13764" rtlCol="0" anchor="t"/>
           <a:lstStyle/>
           <a:p>
             <a:pPr algn="l" indent="0" marL="0">
               <a:lnSpc>
-                <a:spcPts val="3120"/>
+                <a:spcPts val="3315"/>
               </a:lnSpc>
               <a:buNone/>
             </a:pPr>
             <a:r>
-              <a:rPr lang="en-US" sz="2400" b="1" dirty="0" spc="-7" kern="0">
+              <a:rPr lang="en-US" sz="2550" b="1" dirty="0" spc="-8" kern="0">
                 <a:solidFill>
                   <a:srgbClr val="F3EEE3"/>
                 </a:solidFill>
@@ -7138,7 +7072,7 @@
               <a:t>Nhóm</a:t>
             </a:r>
             <a:r>
-              <a:rPr lang="en-US" sz="2400" b="1" dirty="0" spc="-4" kern="0">
+              <a:rPr lang="en-US" sz="2550" b="1" dirty="0" spc="-3" kern="0">
                 <a:solidFill>
                   <a:srgbClr val="F3EEE3"/>
                 </a:solidFill>
@@ -7149,7 +7083,7 @@
               <a:t> cố</a:t>
             </a:r>
             <a:r>
-              <a:rPr lang="en-US" sz="2400" b="1" dirty="0" spc="13" kern="0">
+              <a:rPr lang="en-US" sz="2550" b="1" dirty="0" spc="12" kern="0">
                 <a:solidFill>
                   <a:srgbClr val="F3EEE3"/>
                 </a:solidFill>
@@ -7160,7 +7094,7 @@
               <a:t> định</a:t>
             </a:r>
             <a:r>
-              <a:rPr lang="en-US" sz="2400" b="1" dirty="0" spc="-5" kern="0">
+              <a:rPr lang="en-US" sz="2550" b="1" dirty="0" spc="-4" kern="0">
                 <a:solidFill>
                   <a:srgbClr val="F3EEE3"/>
                 </a:solidFill>
@@ -7171,7 +7105,7 @@
               <a:t> theo</a:t>
             </a:r>
             <a:r>
-              <a:rPr lang="en-US" sz="2400" b="1" dirty="0" spc="1" kern="0">
+              <a:rPr lang="en-US" sz="2550" b="1" dirty="0" spc="-1" kern="0">
                 <a:solidFill>
                   <a:srgbClr val="F3EEE3"/>
                 </a:solidFill>
@@ -7182,7 +7116,7 @@
               <a:t> băm</a:t>
             </a:r>
             <a:r>
-              <a:rPr lang="en-US" sz="2400" b="1" dirty="0" spc="-3" kern="0">
+              <a:rPr lang="en-US" sz="2550" b="1" dirty="0" spc="-5" kern="0">
                 <a:solidFill>
                   <a:srgbClr val="F3EEE3"/>
                 </a:solidFill>
@@ -7193,7 +7127,7 @@
               <a:t> mã</a:t>
             </a:r>
             <a:r>
-              <a:rPr lang="en-US" sz="2400" b="1" dirty="0" spc="14" kern="0">
+              <a:rPr lang="en-US" sz="2550" b="1" dirty="0" spc="12" kern="0">
                 <a:solidFill>
                   <a:srgbClr val="F3EEE3"/>
                 </a:solidFill>
@@ -7204,7 +7138,7 @@
               <a:t> định</a:t>
             </a:r>
             <a:r>
-              <a:rPr lang="en-US" sz="2400" b="1" dirty="0" spc="-1" kern="0">
+              <a:rPr lang="en-US" sz="2550" b="1" dirty="0" spc="-1" kern="0">
                 <a:solidFill>
                   <a:srgbClr val="F3EEE3"/>
                 </a:solidFill>
@@ -7214,7 +7148,7 @@
               </a:rPr>
               <a:t> danh</a:t>
             </a:r>
-            <a:endParaRPr lang="en-US" sz="2400" dirty="0"/>
+            <a:endParaRPr lang="en-US" sz="2550" dirty="0"/>
           </a:p>
         </p:txBody>
       </p:sp>
@@ -7327,17 +7261,17 @@
           <a:ln/>
         </p:spPr>
         <p:txBody>
-          <a:bodyPr wrap="square" lIns="0" tIns="12954" rIns="0" bIns="-12954" rtlCol="0" anchor="t"/>
+          <a:bodyPr wrap="square" lIns="0" tIns="13764" rIns="0" bIns="-13764" rtlCol="0" anchor="t"/>
           <a:lstStyle/>
           <a:p>
             <a:pPr algn="l" indent="0" marL="0">
               <a:lnSpc>
-                <a:spcPts val="3120"/>
+                <a:spcPts val="3315"/>
               </a:lnSpc>
               <a:buNone/>
             </a:pPr>
             <a:r>
-              <a:rPr lang="en-US" sz="2400" b="1" dirty="0" spc="-8" kern="0">
+              <a:rPr lang="en-US" sz="2550" b="1" dirty="0" spc="-6" kern="0">
                 <a:solidFill>
                   <a:srgbClr val="F3EEE3"/>
                 </a:solidFill>
@@ -7348,7 +7282,7 @@
               <a:t>Theo</a:t>
             </a:r>
             <a:r>
-              <a:rPr lang="en-US" sz="2400" b="1" dirty="0" spc="-2" kern="0">
+              <a:rPr lang="en-US" sz="2550" b="1" dirty="0" spc="-1" kern="0">
                 <a:solidFill>
                   <a:srgbClr val="F3EEE3"/>
                 </a:solidFill>
@@ -7359,7 +7293,7 @@
               <a:t> dõi</a:t>
             </a:r>
             <a:r>
-              <a:rPr lang="en-US" sz="2400" b="1" dirty="0" spc="-1" kern="0">
+              <a:rPr lang="en-US" sz="2550" b="1" dirty="0" spc="-5" kern="0">
                 <a:solidFill>
                   <a:srgbClr val="F3EEE3"/>
                 </a:solidFill>
@@ -7370,7 +7304,7 @@
               <a:t> số</a:t>
             </a:r>
             <a:r>
-              <a:rPr lang="en-US" sz="2400" b="1" dirty="0" spc="10" kern="0">
+              <a:rPr lang="en-US" sz="2550" b="1" dirty="0" spc="5" kern="0">
                 <a:solidFill>
                   <a:srgbClr val="F3EEE3"/>
                 </a:solidFill>
@@ -7378,10 +7312,10 @@
                 <a:ea typeface="Be Vietnam Pro" pitchFamily="34" charset="-122"/>
                 <a:cs typeface="Be Vietnam Pro" pitchFamily="34" charset="-120"/>
               </a:rPr>
-              <a:t> đo đã</a:t>
-            </a:r>
-            <a:r>
-              <a:rPr lang="en-US" sz="2400" b="1" dirty="0" spc="-6" kern="0">
+              <a:t> đo</a:t>
+            </a:r>
+            <a:r>
+              <a:rPr lang="en-US" sz="2550" b="1" dirty="0" spc="6" kern="0">
                 <a:solidFill>
                   <a:srgbClr val="F3EEE3"/>
                 </a:solidFill>
@@ -7389,9 +7323,20 @@
                 <a:ea typeface="Be Vietnam Pro" pitchFamily="34" charset="-122"/>
                 <a:cs typeface="Be Vietnam Pro" pitchFamily="34" charset="-120"/>
               </a:rPr>
+              <a:t> đã</a:t>
+            </a:r>
+            <a:r>
+              <a:rPr lang="en-US" sz="2550" b="1" dirty="0" spc="-5" kern="0">
+                <a:solidFill>
+                  <a:srgbClr val="F3EEE3"/>
+                </a:solidFill>
+                <a:latin typeface="Be Vietnam Pro" pitchFamily="34" charset="0"/>
+                <a:ea typeface="Be Vietnam Pro" pitchFamily="34" charset="-122"/>
+                <a:cs typeface="Be Vietnam Pro" pitchFamily="34" charset="-120"/>
+              </a:rPr>
               <a:t> chọn</a:t>
             </a:r>
-            <a:endParaRPr lang="en-US" sz="2400" dirty="0"/>
+            <a:endParaRPr lang="en-US" sz="2550" dirty="0"/>
           </a:p>
         </p:txBody>
       </p:sp>
@@ -7504,17 +7449,17 @@
           <a:ln/>
         </p:spPr>
         <p:txBody>
-          <a:bodyPr wrap="square" lIns="0" tIns="12954" rIns="0" bIns="-12954" rtlCol="0" anchor="t"/>
+          <a:bodyPr wrap="square" lIns="0" tIns="13764" rIns="0" bIns="-13764" rtlCol="0" anchor="t"/>
           <a:lstStyle/>
           <a:p>
             <a:pPr algn="l" indent="0" marL="0">
               <a:lnSpc>
-                <a:spcPts val="3120"/>
+                <a:spcPts val="3315"/>
               </a:lnSpc>
               <a:buNone/>
             </a:pPr>
             <a:r>
-              <a:rPr lang="en-US" sz="2400" b="1" dirty="0" spc="-2" kern="0">
+              <a:rPr lang="en-US" sz="2550" b="1" dirty="0" spc="-1" kern="0">
                 <a:solidFill>
                   <a:srgbClr val="F3EEE3"/>
                 </a:solidFill>
@@ -7525,7 +7470,7 @@
               <a:t>Chạm</a:t>
             </a:r>
             <a:r>
-              <a:rPr lang="en-US" sz="2400" b="1" dirty="0" spc="13" kern="0">
+              <a:rPr lang="en-US" sz="2550" b="1" dirty="0" spc="14" kern="0">
                 <a:solidFill>
                   <a:srgbClr val="F3EEE3"/>
                 </a:solidFill>
@@ -7536,7 +7481,7 @@
               <a:t> điều</a:t>
             </a:r>
             <a:r>
-              <a:rPr lang="en-US" sz="2400" b="1" dirty="0" spc="-4" kern="0">
+              <a:rPr lang="en-US" sz="2550" b="1" dirty="0" spc="-2" kern="0">
                 <a:solidFill>
                   <a:srgbClr val="F3EEE3"/>
                 </a:solidFill>
@@ -7547,7 +7492,7 @@
               <a:t> kiện</a:t>
             </a:r>
             <a:r>
-              <a:rPr lang="en-US" sz="2400" b="1" dirty="0" spc="22" kern="0">
+              <a:rPr lang="en-US" sz="2550" b="1" dirty="0" spc="24" kern="0">
                 <a:solidFill>
                   <a:srgbClr val="F3EEE3"/>
                 </a:solidFill>
@@ -7558,7 +7503,7 @@
               <a:t> dừng</a:t>
             </a:r>
             <a:r>
-              <a:rPr lang="en-US" sz="2400" b="1" dirty="0" spc="0" kern="0">
+              <a:rPr lang="en-US" sz="2550" b="1" dirty="0" spc="0" kern="0">
                 <a:solidFill>
                   <a:srgbClr val="F3EEE3"/>
                 </a:solidFill>
@@ -7569,7 +7514,7 @@
               <a:t> thì</a:t>
             </a:r>
             <a:r>
-              <a:rPr lang="en-US" sz="2400" b="1" dirty="0" spc="23" kern="0">
+              <a:rPr lang="en-US" sz="2550" b="1" dirty="0" spc="24" kern="0">
                 <a:solidFill>
                   <a:srgbClr val="F3EEE3"/>
                 </a:solidFill>
@@ -7579,7 +7524,7 @@
               </a:rPr>
               <a:t> dừng</a:t>
             </a:r>
-            <a:endParaRPr lang="en-US" sz="2400" dirty="0"/>
+            <a:endParaRPr lang="en-US" sz="2550" dirty="0"/>
           </a:p>
         </p:txBody>
       </p:sp>
@@ -7635,7 +7580,7 @@
               <a:buNone/>
             </a:pPr>
             <a:r>
-              <a:rPr lang="en-US" sz="2400" dirty="0" spc="-7" kern="0">
+              <a:rPr lang="en-US" sz="2550" dirty="0" spc="-7" kern="0">
                 <a:solidFill>
                   <a:srgbClr val="E4E1D8"/>
                 </a:solidFill>
@@ -7646,7 +7591,7 @@
               <a:t>Một</a:t>
             </a:r>
             <a:r>
-              <a:rPr lang="en-US" sz="2400" dirty="0" spc="6" kern="0">
+              <a:rPr lang="en-US" sz="2550" dirty="0" spc="5" kern="0">
                 <a:solidFill>
                   <a:srgbClr val="E4E1D8"/>
                 </a:solidFill>
@@ -7657,7 +7602,7 @@
               <a:t> người</a:t>
             </a:r>
             <a:r>
-              <a:rPr lang="en-US" sz="2400" dirty="0" spc="0" kern="0">
+              <a:rPr lang="en-US" sz="2550" dirty="0" spc="1" kern="0">
                 <a:solidFill>
                   <a:srgbClr val="E4E1D8"/>
                 </a:solidFill>
@@ -7668,7 +7613,7 @@
               <a:t> luôn</a:t>
             </a:r>
             <a:r>
-              <a:rPr lang="en-US" sz="2400" dirty="0" spc="-6" kern="0">
+              <a:rPr lang="en-US" sz="2550" dirty="0" spc="-7" kern="0">
                 <a:solidFill>
                   <a:srgbClr val="E4E1D8"/>
                 </a:solidFill>
@@ -7679,7 +7624,7 @@
               <a:t> thấy</a:t>
             </a:r>
             <a:r>
-              <a:rPr lang="en-US" sz="2400" dirty="0" spc="2" kern="0">
+              <a:rPr lang="en-US" sz="2550" dirty="0" spc="-1" kern="0">
                 <a:solidFill>
                   <a:srgbClr val="E4E1D8"/>
                 </a:solidFill>
@@ -7690,7 +7635,7 @@
               <a:t> cùng</a:t>
             </a:r>
             <a:r>
-              <a:rPr lang="en-US" sz="2400" dirty="0" spc="-3" kern="0">
+              <a:rPr lang="en-US" sz="2550" dirty="0" spc="-5" kern="0">
                 <a:solidFill>
                   <a:srgbClr val="E4E1D8"/>
                 </a:solidFill>
@@ -7701,7 +7646,7 @@
               <a:t> một</a:t>
             </a:r>
             <a:r>
-              <a:rPr lang="en-US" sz="2400" dirty="0" spc="0" kern="0">
+              <a:rPr lang="en-US" sz="2550" dirty="0" spc="-1" kern="0">
                 <a:solidFill>
                   <a:srgbClr val="E4E1D8"/>
                 </a:solidFill>
@@ -7712,7 +7657,7 @@
               <a:t> phiên</a:t>
             </a:r>
             <a:r>
-              <a:rPr lang="en-US" sz="2400" dirty="0" spc="-1" kern="0">
+              <a:rPr lang="en-US" sz="2550" dirty="0" spc="-2" kern="0">
                 <a:solidFill>
                   <a:srgbClr val="E4E1D8"/>
                 </a:solidFill>
@@ -7723,7 +7668,7 @@
               <a:t> bản</a:t>
             </a:r>
             <a:r>
-              <a:rPr lang="en-US" sz="2400" dirty="0" spc="1" kern="0">
+              <a:rPr lang="en-US" sz="2550" dirty="0" spc="1" kern="0">
                 <a:solidFill>
                   <a:srgbClr val="E4E1D8"/>
                 </a:solidFill>
@@ -7734,7 +7679,7 @@
               <a:t> qua</a:t>
             </a:r>
             <a:r>
-              <a:rPr lang="en-US" sz="2400" dirty="0" spc="0" kern="0">
+              <a:rPr lang="en-US" sz="2550" dirty="0" spc="0" kern="0">
                 <a:solidFill>
                   <a:srgbClr val="E4E1D8"/>
                 </a:solidFill>
@@ -7745,7 +7690,7 @@
               <a:t> các</a:t>
             </a:r>
             <a:r>
-              <a:rPr lang="en-US" sz="2400" dirty="0" spc="2" kern="0">
+              <a:rPr lang="en-US" sz="2550" dirty="0" spc="1" kern="0">
                 <a:solidFill>
                   <a:srgbClr val="E4E1D8"/>
                 </a:solidFill>
@@ -7756,7 +7701,7 @@
               <a:t> lần</a:t>
             </a:r>
             <a:r>
-              <a:rPr lang="en-US" sz="2400" dirty="0" spc="-9" kern="0">
+              <a:rPr lang="en-US" sz="2550" dirty="0" spc="-9" kern="0">
                 <a:solidFill>
                   <a:srgbClr val="E4E1D8"/>
                 </a:solidFill>
@@ -7766,7 +7711,7 @@
               </a:rPr>
               <a:t> tải.</a:t>
             </a:r>
-            <a:endParaRPr lang="en-US" sz="2400" dirty="0"/>
+            <a:endParaRPr lang="en-US" sz="2550" dirty="0"/>
           </a:p>
         </p:txBody>
       </p:sp>
@@ -8547,17 +8492,17 @@
           <a:ln/>
         </p:spPr>
         <p:txBody>
-          <a:bodyPr wrap="square" lIns="0" tIns="9144" rIns="0" bIns="-9144" rtlCol="0" anchor="t"/>
+          <a:bodyPr wrap="square" lIns="0" tIns="9700" rIns="0" bIns="-9700" rtlCol="0" anchor="t"/>
           <a:lstStyle/>
           <a:p>
             <a:pPr algn="l" indent="0" marL="0">
               <a:lnSpc>
-                <a:spcPts val="3240"/>
+                <a:spcPts val="3443"/>
               </a:lnSpc>
               <a:buNone/>
             </a:pPr>
             <a:r>
-              <a:rPr lang="en-US" sz="2400" dirty="0" spc="-1" kern="0">
+              <a:rPr lang="en-US" sz="2550" dirty="0" spc="-1" kern="0">
                 <a:solidFill>
                   <a:srgbClr val="14161C"/>
                 </a:solidFill>
@@ -8568,7 +8513,7 @@
               <a:t>Mọi</a:t>
             </a:r>
             <a:r>
-              <a:rPr lang="en-US" sz="2400" dirty="0" spc="6" kern="0">
+              <a:rPr lang="en-US" sz="2550" dirty="0" spc="5" kern="0">
                 <a:solidFill>
                   <a:srgbClr val="14161C"/>
                 </a:solidFill>
@@ -8579,7 +8524,7 @@
               <a:t> người</a:t>
             </a:r>
             <a:r>
-              <a:rPr lang="en-US" sz="2400" dirty="0" spc="3" kern="0">
+              <a:rPr lang="en-US" sz="2550" dirty="0" spc="-1" kern="0">
                 <a:solidFill>
                   <a:srgbClr val="14161C"/>
                 </a:solidFill>
@@ -8590,7 +8535,7 @@
               <a:t> dùng</a:t>
             </a:r>
             <a:r>
-              <a:rPr lang="en-US" sz="2400" dirty="0" spc="-6" kern="0">
+              <a:rPr lang="en-US" sz="2550" dirty="0" spc="-7" kern="0">
                 <a:solidFill>
                   <a:srgbClr val="14161C"/>
                 </a:solidFill>
@@ -8601,7 +8546,7 @@
               <a:t> thấy</a:t>
             </a:r>
             <a:r>
-              <a:rPr lang="en-US" sz="2400" dirty="0" spc="2" kern="0">
+              <a:rPr lang="en-US" sz="2550" dirty="0" spc="0" kern="0">
                 <a:solidFill>
                   <a:srgbClr val="14161C"/>
                 </a:solidFill>
@@ -8612,7 +8557,7 @@
               <a:t> hành</a:t>
             </a:r>
             <a:r>
-              <a:rPr lang="en-US" sz="2400" dirty="0" spc="-3" kern="0">
+              <a:rPr lang="en-US" sz="2550" dirty="0" spc="-3" kern="0">
                 <a:solidFill>
                   <a:srgbClr val="14161C"/>
                 </a:solidFill>
@@ -8623,7 +8568,7 @@
               <a:t> vi</a:t>
             </a:r>
             <a:r>
-              <a:rPr lang="en-US" sz="2400" dirty="0" spc="1" kern="0">
+              <a:rPr lang="en-US" sz="2550" dirty="0" spc="1" kern="0">
                 <a:solidFill>
                   <a:srgbClr val="14161C"/>
                 </a:solidFill>
@@ -8633,7 +8578,7 @@
               </a:rPr>
               <a:t> mới.</a:t>
             </a:r>
-            <a:endParaRPr lang="en-US" sz="2400" dirty="0"/>
+            <a:endParaRPr lang="en-US" sz="2550" dirty="0"/>
           </a:p>
         </p:txBody>
       </p:sp>
@@ -8768,17 +8713,17 @@
           <a:ln/>
         </p:spPr>
         <p:txBody>
-          <a:bodyPr wrap="square" lIns="0" tIns="9144" rIns="0" bIns="-9144" rtlCol="0" anchor="t"/>
+          <a:bodyPr wrap="square" lIns="0" tIns="9700" rIns="0" bIns="-9700" rtlCol="0" anchor="t"/>
           <a:lstStyle/>
           <a:p>
             <a:pPr algn="l" indent="0" marL="0">
               <a:lnSpc>
-                <a:spcPts val="3240"/>
+                <a:spcPts val="3443"/>
               </a:lnSpc>
               <a:buNone/>
             </a:pPr>
             <a:r>
-              <a:rPr lang="en-US" sz="2400" dirty="0" spc="2" kern="0">
+              <a:rPr lang="en-US" sz="2550" dirty="0" spc="-4" kern="0">
                 <a:solidFill>
                   <a:srgbClr val="14161C"/>
                 </a:solidFill>
@@ -8789,7 +8734,7 @@
               <a:t>Giữ</a:t>
             </a:r>
             <a:r>
-              <a:rPr lang="en-US" sz="2400" dirty="0" spc="0" kern="0">
+              <a:rPr lang="en-US" sz="2550" dirty="0" spc="0" kern="0">
                 <a:solidFill>
                   <a:srgbClr val="14161C"/>
                 </a:solidFill>
@@ -8800,7 +8745,7 @@
               <a:t> cờ</a:t>
             </a:r>
             <a:r>
-              <a:rPr lang="en-US" sz="2400" dirty="0" spc="3" kern="0">
+              <a:rPr lang="en-US" sz="2550" dirty="0" spc="1" kern="0">
                 <a:solidFill>
                   <a:srgbClr val="14161C"/>
                 </a:solidFill>
@@ -8811,7 +8756,7 @@
               <a:t> làm</a:t>
             </a:r>
             <a:r>
-              <a:rPr lang="en-US" sz="2400" dirty="0" spc="1" kern="0">
+              <a:rPr lang="en-US" sz="2550" dirty="0" spc="0" kern="0">
                 <a:solidFill>
                   <a:srgbClr val="14161C"/>
                 </a:solidFill>
@@ -8822,7 +8767,7 @@
               <a:t> công</a:t>
             </a:r>
             <a:r>
-              <a:rPr lang="en-US" sz="2400" dirty="0" spc="-10" kern="0">
+              <a:rPr lang="en-US" sz="2550" dirty="0" spc="-11" kern="0">
                 <a:solidFill>
                   <a:srgbClr val="14161C"/>
                 </a:solidFill>
@@ -8833,7 +8778,7 @@
               <a:t> tắc</a:t>
             </a:r>
             <a:r>
-              <a:rPr lang="en-US" sz="2400" dirty="0" spc="0" kern="0">
+              <a:rPr lang="en-US" sz="2550" dirty="0" spc="1" kern="0">
                 <a:solidFill>
                   <a:srgbClr val="14161C"/>
                 </a:solidFill>
@@ -8841,20 +8786,9 @@
                 <a:ea typeface="Be Vietnam Pro" pitchFamily="34" charset="-122"/>
                 <a:cs typeface="Be Vietnam Pro" pitchFamily="34" charset="-120"/>
               </a:rPr>
-              <a:t> khẩn</a:t>
-            </a:r>
-            <a:r>
-              <a:rPr lang="en-US" sz="2400" dirty="0" spc="1" kern="0">
-                <a:solidFill>
-                  <a:srgbClr val="14161C"/>
-                </a:solidFill>
-                <a:latin typeface="Be Vietnam Pro" pitchFamily="34" charset="0"/>
-                <a:ea typeface="Be Vietnam Pro" pitchFamily="34" charset="-122"/>
-                <a:cs typeface="Be Vietnam Pro" pitchFamily="34" charset="-120"/>
-              </a:rPr>
-              <a:t> cấp.</a:t>
-            </a:r>
-            <a:endParaRPr lang="en-US" sz="2400" dirty="0"/>
+              <a:t> khẩn cấp.</a:t>
+            </a:r>
+            <a:endParaRPr lang="en-US" sz="2550" dirty="0"/>
           </a:p>
         </p:txBody>
       </p:sp>
@@ -8978,17 +8912,17 @@
           <a:ln/>
         </p:spPr>
         <p:txBody>
-          <a:bodyPr wrap="square" lIns="0" tIns="9144" rIns="0" bIns="-9144" rtlCol="0" anchor="t"/>
+          <a:bodyPr wrap="square" lIns="0" tIns="9700" rIns="0" bIns="-9700" rtlCol="0" anchor="t"/>
           <a:lstStyle/>
           <a:p>
             <a:pPr algn="l" indent="0" marL="0">
               <a:lnSpc>
-                <a:spcPts val="3240"/>
+                <a:spcPts val="3443"/>
               </a:lnSpc>
               <a:buNone/>
             </a:pPr>
             <a:r>
-              <a:rPr lang="en-US" sz="2400" dirty="0" spc="2" kern="0">
+              <a:rPr lang="en-US" sz="2550" dirty="0" spc="-1" kern="0">
                 <a:solidFill>
                   <a:srgbClr val="14161C"/>
                 </a:solidFill>
@@ -8999,7 +8933,7 @@
               <a:t>Sang</a:t>
             </a:r>
             <a:r>
-              <a:rPr lang="en-US" sz="2400" dirty="0" spc="20" kern="0">
+              <a:rPr lang="en-US" sz="2550" dirty="0" spc="21" kern="0">
                 <a:solidFill>
                   <a:srgbClr val="14161C"/>
                 </a:solidFill>
@@ -9010,7 +8944,7 @@
               <a:t> điểm</a:t>
             </a:r>
             <a:r>
-              <a:rPr lang="en-US" sz="2400" dirty="0" spc="23" kern="0">
+              <a:rPr lang="en-US" sz="2550" dirty="0" spc="19" kern="0">
                 <a:solidFill>
                   <a:srgbClr val="14161C"/>
                 </a:solidFill>
@@ -9021,7 +8955,7 @@
               <a:t> dừng</a:t>
             </a:r>
             <a:r>
-              <a:rPr lang="en-US" sz="2400" dirty="0" spc="-2" kern="0">
+              <a:rPr lang="en-US" sz="2550" dirty="0" spc="0" kern="0">
                 <a:solidFill>
                   <a:srgbClr val="14161C"/>
                 </a:solidFill>
@@ -9032,7 +8966,7 @@
               <a:t> 5:</a:t>
             </a:r>
             <a:r>
-              <a:rPr lang="en-US" sz="2400" dirty="0" spc="2" kern="0">
+              <a:rPr lang="en-US" sz="2550" dirty="0" spc="-1" kern="0">
                 <a:solidFill>
                   <a:srgbClr val="14161C"/>
                 </a:solidFill>
@@ -9043,7 +8977,7 @@
               <a:t> dọn</a:t>
             </a:r>
             <a:r>
-              <a:rPr lang="en-US" sz="2400" dirty="0" spc="0" kern="0">
+              <a:rPr lang="en-US" sz="2550" dirty="0" spc="1" kern="0">
                 <a:solidFill>
                   <a:srgbClr val="14161C"/>
                 </a:solidFill>
@@ -9053,7 +8987,7 @@
               </a:rPr>
               <a:t> cờ.</a:t>
             </a:r>
-            <a:endParaRPr lang="en-US" sz="2400" dirty="0"/>
+            <a:endParaRPr lang="en-US" sz="2550" dirty="0"/>
           </a:p>
         </p:txBody>
       </p:sp>
@@ -9786,12 +9720,12 @@
           <a:ln/>
         </p:spPr>
         <p:txBody>
-          <a:bodyPr wrap="square" lIns="0" tIns="5334" rIns="0" bIns="-5334" rtlCol="0" anchor="t"/>
+          <a:bodyPr wrap="square" lIns="0" tIns="5667" rIns="0" bIns="-5667" rtlCol="0" anchor="t"/>
           <a:lstStyle/>
           <a:p>
-            <a:pPr algn="l" marL="304800" indent="-217761">
+            <a:pPr algn="l" marL="323850" indent="-231371">
               <a:lnSpc>
-                <a:spcPts val="3360"/>
+                <a:spcPts val="3570"/>
               </a:lnSpc>
               <a:spcAft>
                 <a:spcPts val="750"/>
@@ -9801,7 +9735,7 @@
               <a:buChar char="•"/>
             </a:pPr>
             <a:r>
-              <a:rPr lang="en-US" sz="2400" dirty="0" spc="6" kern="0">
+              <a:rPr lang="en-US" sz="2550" dirty="0" spc="5" kern="0">
                 <a:solidFill>
                   <a:srgbClr val="14161C"/>
                 </a:solidFill>
@@ -9812,7 +9746,7 @@
               <a:t>Thường</a:t>
             </a:r>
             <a:r>
-              <a:rPr lang="en-US" sz="2400" dirty="0" spc="-7" kern="0">
+              <a:rPr lang="en-US" sz="2550" dirty="0" spc="-11" kern="0">
                 <a:solidFill>
                   <a:srgbClr val="14161C"/>
                 </a:solidFill>
@@ -9823,7 +9757,7 @@
               <a:t> ngắn</a:t>
             </a:r>
             <a:r>
-              <a:rPr lang="en-US" sz="2400" dirty="0" spc="1" kern="0">
+              <a:rPr lang="en-US" sz="2550" dirty="0" spc="1" kern="0">
                 <a:solidFill>
                   <a:srgbClr val="14161C"/>
                 </a:solidFill>
@@ -9833,19 +9767,19 @@
               </a:rPr>
               <a:t> hạn.</a:t>
             </a:r>
-            <a:endParaRPr lang="en-US" sz="2400" dirty="0"/>
+            <a:endParaRPr lang="en-US" sz="2550" dirty="0"/>
           </a:p>
           <a:p>
-            <a:pPr algn="l" marL="304800" indent="-217761">
+            <a:pPr algn="l" marL="323850" indent="-231371">
               <a:lnSpc>
-                <a:spcPts val="3360"/>
+                <a:spcPts val="3570"/>
               </a:lnSpc>
               <a:buSzPct val="100000"/>
               <a:buFont typeface="Arial"/>
               <a:buChar char="•"/>
             </a:pPr>
             <a:r>
-              <a:rPr lang="en-US" sz="2400" dirty="0" spc="-2" kern="0">
+              <a:rPr lang="en-US" sz="2550" dirty="0" spc="2" kern="0">
                 <a:solidFill>
                   <a:srgbClr val="14161C"/>
                 </a:solidFill>
@@ -9856,7 +9790,7 @@
               <a:t>Nên</a:t>
             </a:r>
             <a:r>
-              <a:rPr lang="en-US" sz="2400" dirty="0" spc="-18" kern="0">
+              <a:rPr lang="en-US" sz="2550" dirty="0" spc="-23" kern="0">
                 <a:solidFill>
                   <a:srgbClr val="14161C"/>
                 </a:solidFill>
@@ -9867,7 +9801,7 @@
               <a:t> xóa</a:t>
             </a:r>
             <a:r>
-              <a:rPr lang="en-US" sz="2400" dirty="0" spc="-7" kern="0">
+              <a:rPr lang="en-US" sz="2550" dirty="0" spc="-6" kern="0">
                 <a:solidFill>
                   <a:srgbClr val="14161C"/>
                 </a:solidFill>
@@ -9878,7 +9812,7 @@
               <a:t> sau</a:t>
             </a:r>
             <a:r>
-              <a:rPr lang="en-US" sz="2400" dirty="0" spc="-2" kern="0">
+              <a:rPr lang="en-US" sz="2550" dirty="0" spc="0" kern="0">
                 <a:solidFill>
                   <a:srgbClr val="14161C"/>
                 </a:solidFill>
@@ -9886,10 +9820,10 @@
                 <a:ea typeface="Be Vietnam Pro" pitchFamily="34" charset="-122"/>
                 <a:cs typeface="Be Vietnam Pro" pitchFamily="34" charset="-120"/>
               </a:rPr>
-              <a:t> khi</a:t>
-            </a:r>
-            <a:r>
-              <a:rPr lang="en-US" sz="2400" dirty="0" spc="3" kern="0">
+              <a:t> khi mở</a:t>
+            </a:r>
+            <a:r>
+              <a:rPr lang="en-US" sz="2550" dirty="0" spc="-3" kern="0">
                 <a:solidFill>
                   <a:srgbClr val="14161C"/>
                 </a:solidFill>
@@ -9897,20 +9831,9 @@
                 <a:ea typeface="Be Vietnam Pro" pitchFamily="34" charset="-122"/>
                 <a:cs typeface="Be Vietnam Pro" pitchFamily="34" charset="-120"/>
               </a:rPr>
-              <a:t> mở</a:t>
-            </a:r>
-            <a:r>
-              <a:rPr lang="en-US" sz="2400" dirty="0" spc="-5" kern="0">
-                <a:solidFill>
-                  <a:srgbClr val="14161C"/>
-                </a:solidFill>
-                <a:latin typeface="Be Vietnam Pro" pitchFamily="34" charset="0"/>
-                <a:ea typeface="Be Vietnam Pro" pitchFamily="34" charset="-122"/>
-                <a:cs typeface="Be Vietnam Pro" pitchFamily="34" charset="-120"/>
-              </a:rPr>
               <a:t> hết.</a:t>
             </a:r>
-            <a:endParaRPr lang="en-US" sz="2400" dirty="0"/>
+            <a:endParaRPr lang="en-US" sz="2550" dirty="0"/>
           </a:p>
         </p:txBody>
       </p:sp>
@@ -10020,12 +9943,12 @@
           <a:ln/>
         </p:spPr>
         <p:txBody>
-          <a:bodyPr wrap="square" lIns="0" tIns="5334" rIns="0" bIns="-5334" rtlCol="0" anchor="t"/>
+          <a:bodyPr wrap="square" lIns="0" tIns="5667" rIns="0" bIns="-5667" rtlCol="0" anchor="t"/>
           <a:lstStyle/>
           <a:p>
-            <a:pPr algn="l" marL="304800" indent="-217761">
+            <a:pPr algn="l" marL="323850" indent="-231371">
               <a:lnSpc>
-                <a:spcPts val="3360"/>
+                <a:spcPts val="3570"/>
               </a:lnSpc>
               <a:spcAft>
                 <a:spcPts val="750"/>
@@ -10035,7 +9958,7 @@
               <a:buChar char="•"/>
             </a:pPr>
             <a:r>
-              <a:rPr lang="en-US" sz="2400" dirty="0" spc="2" kern="0">
+              <a:rPr lang="en-US" sz="2550" dirty="0" spc="-3" kern="0">
                 <a:solidFill>
                   <a:srgbClr val="14161C"/>
                 </a:solidFill>
@@ -10046,7 +9969,7 @@
               <a:t>Dùng</a:t>
             </a:r>
             <a:r>
-              <a:rPr lang="en-US" sz="2400" dirty="0" spc="3" kern="0">
+              <a:rPr lang="en-US" sz="2550" dirty="0" spc="1" kern="0">
                 <a:solidFill>
                   <a:srgbClr val="14161C"/>
                 </a:solidFill>
@@ -10057,7 +9980,7 @@
               <a:t> làm</a:t>
             </a:r>
             <a:r>
-              <a:rPr lang="en-US" sz="2400" dirty="0" spc="1" kern="0">
+              <a:rPr lang="en-US" sz="2550" dirty="0" spc="0" kern="0">
                 <a:solidFill>
                   <a:srgbClr val="14161C"/>
                 </a:solidFill>
@@ -10068,7 +9991,7 @@
               <a:t> công</a:t>
             </a:r>
             <a:r>
-              <a:rPr lang="en-US" sz="2400" dirty="0" spc="-10" kern="0">
+              <a:rPr lang="en-US" sz="2550" dirty="0" spc="-11" kern="0">
                 <a:solidFill>
                   <a:srgbClr val="14161C"/>
                 </a:solidFill>
@@ -10079,7 +10002,7 @@
               <a:t> tắc</a:t>
             </a:r>
             <a:r>
-              <a:rPr lang="en-US" sz="2400" dirty="0" spc="0" kern="0">
+              <a:rPr lang="en-US" sz="2550" dirty="0" spc="1" kern="0">
                 <a:solidFill>
                   <a:srgbClr val="14161C"/>
                 </a:solidFill>
@@ -10087,32 +10010,21 @@
                 <a:ea typeface="Be Vietnam Pro" pitchFamily="34" charset="-122"/>
                 <a:cs typeface="Be Vietnam Pro" pitchFamily="34" charset="-120"/>
               </a:rPr>
-              <a:t> khẩn</a:t>
-            </a:r>
-            <a:r>
-              <a:rPr lang="en-US" sz="2400" dirty="0" spc="1" kern="0">
-                <a:solidFill>
-                  <a:srgbClr val="14161C"/>
-                </a:solidFill>
-                <a:latin typeface="Be Vietnam Pro" pitchFamily="34" charset="0"/>
-                <a:ea typeface="Be Vietnam Pro" pitchFamily="34" charset="-122"/>
-                <a:cs typeface="Be Vietnam Pro" pitchFamily="34" charset="-120"/>
-              </a:rPr>
-              <a:t> cấp.</a:t>
-            </a:r>
-            <a:endParaRPr lang="en-US" sz="2400" dirty="0"/>
+              <a:t> khẩn cấp.</a:t>
+            </a:r>
+            <a:endParaRPr lang="en-US" sz="2550" dirty="0"/>
           </a:p>
           <a:p>
-            <a:pPr algn="l" marL="304800" indent="-217761">
+            <a:pPr algn="l" marL="323850" indent="-231371">
               <a:lnSpc>
-                <a:spcPts val="3360"/>
+                <a:spcPts val="3570"/>
               </a:lnSpc>
               <a:buSzPct val="100000"/>
               <a:buFont typeface="Arial"/>
               <a:buChar char="•"/>
             </a:pPr>
             <a:r>
-              <a:rPr lang="en-US" sz="2400" dirty="0" spc="0" kern="0">
+              <a:rPr lang="en-US" sz="2550" dirty="0" spc="1" kern="0">
                 <a:solidFill>
                   <a:srgbClr val="14161C"/>
                 </a:solidFill>
@@ -10120,10 +10032,10 @@
                 <a:ea typeface="Be Vietnam Pro" pitchFamily="34" charset="-122"/>
                 <a:cs typeface="Be Vietnam Pro" pitchFamily="34" charset="-120"/>
               </a:rPr>
-              <a:t>Có</a:t>
-            </a:r>
-            <a:r>
-              <a:rPr lang="en-US" sz="2400" dirty="0" spc="1" kern="0">
+              <a:t>Có thể</a:t>
+            </a:r>
+            <a:r>
+              <a:rPr lang="en-US" sz="2550" dirty="0" spc="-6" kern="0">
                 <a:solidFill>
                   <a:srgbClr val="14161C"/>
                 </a:solidFill>
@@ -10131,10 +10043,10 @@
                 <a:ea typeface="Be Vietnam Pro" pitchFamily="34" charset="-122"/>
                 <a:cs typeface="Be Vietnam Pro" pitchFamily="34" charset="-120"/>
               </a:rPr>
-              <a:t> thể</a:t>
-            </a:r>
-            <a:r>
-              <a:rPr lang="en-US" sz="2400" dirty="0" spc="-4" kern="0">
+              <a:t> sống</a:t>
+            </a:r>
+            <a:r>
+              <a:rPr lang="en-US" sz="2550" dirty="0" spc="2" kern="0">
                 <a:solidFill>
                   <a:srgbClr val="14161C"/>
                 </a:solidFill>
@@ -10142,10 +10054,10 @@
                 <a:ea typeface="Be Vietnam Pro" pitchFamily="34" charset="-122"/>
                 <a:cs typeface="Be Vietnam Pro" pitchFamily="34" charset="-120"/>
               </a:rPr>
-              <a:t> sống</a:t>
-            </a:r>
-            <a:r>
-              <a:rPr lang="en-US" sz="2400" dirty="0" spc="0" kern="0">
+              <a:t> lâu</a:t>
+            </a:r>
+            <a:r>
+              <a:rPr lang="en-US" sz="2550" dirty="0" spc="0" kern="0">
                 <a:solidFill>
                   <a:srgbClr val="14161C"/>
                 </a:solidFill>
@@ -10153,20 +10065,9 @@
                 <a:ea typeface="Be Vietnam Pro" pitchFamily="34" charset="-122"/>
                 <a:cs typeface="Be Vietnam Pro" pitchFamily="34" charset="-120"/>
               </a:rPr>
-              <a:t> lâu</a:t>
-            </a:r>
-            <a:r>
-              <a:rPr lang="en-US" sz="2400" dirty="0" spc="1" kern="0">
-                <a:solidFill>
-                  <a:srgbClr val="14161C"/>
-                </a:solidFill>
-                <a:latin typeface="Be Vietnam Pro" pitchFamily="34" charset="0"/>
-                <a:ea typeface="Be Vietnam Pro" pitchFamily="34" charset="-122"/>
-                <a:cs typeface="Be Vietnam Pro" pitchFamily="34" charset="-120"/>
-              </a:rPr>
               <a:t> hơn.</a:t>
             </a:r>
-            <a:endParaRPr lang="en-US" sz="2400" dirty="0"/>
+            <a:endParaRPr lang="en-US" sz="2550" dirty="0"/>
           </a:p>
         </p:txBody>
       </p:sp>
@@ -10278,7 +10179,7 @@
               <a:buNone/>
             </a:pPr>
             <a:r>
-              <a:rPr lang="en-US" sz="2400" dirty="0" spc="-12" kern="0">
+              <a:rPr lang="en-US" sz="2550" dirty="0" spc="-16" kern="0">
                 <a:solidFill>
                   <a:srgbClr val="14161C"/>
                 </a:solidFill>
@@ -10289,7 +10190,7 @@
               <a:t>Đặt</a:t>
             </a:r>
             <a:r>
-              <a:rPr lang="en-US" sz="2400" dirty="0" spc="6" kern="0">
+              <a:rPr lang="en-US" sz="2550" dirty="0" spc="5" kern="0">
                 <a:solidFill>
                   <a:srgbClr val="14161C"/>
                 </a:solidFill>
@@ -10300,7 +10201,7 @@
               <a:t> người</a:t>
             </a:r>
             <a:r>
-              <a:rPr lang="en-US" sz="2400" dirty="0" spc="-1" kern="0">
+              <a:rPr lang="en-US" sz="2550" dirty="0" spc="2" kern="0">
                 <a:solidFill>
                   <a:srgbClr val="14161C"/>
                 </a:solidFill>
@@ -10311,7 +10212,7 @@
               <a:t> chịu</a:t>
             </a:r>
             <a:r>
-              <a:rPr lang="en-US" sz="2400" dirty="0" spc="-15" kern="0">
+              <a:rPr lang="en-US" sz="2550" dirty="0" spc="-16" kern="0">
                 <a:solidFill>
                   <a:srgbClr val="14161C"/>
                 </a:solidFill>
@@ -10322,7 +10223,7 @@
               <a:t> trách</a:t>
             </a:r>
             <a:r>
-              <a:rPr lang="en-US" sz="2400" dirty="0" spc="0" kern="0">
+              <a:rPr lang="en-US" sz="2550" dirty="0" spc="0" kern="0">
                 <a:solidFill>
                   <a:srgbClr val="14161C"/>
                 </a:solidFill>
@@ -10333,7 +10234,7 @@
               <a:t> nhiệm</a:t>
             </a:r>
             <a:r>
-              <a:rPr lang="en-US" sz="2400" dirty="0" spc="-15" kern="0">
+              <a:rPr lang="en-US" sz="2550" dirty="0" spc="-19" kern="0">
                 <a:solidFill>
                   <a:srgbClr val="14161C"/>
                 </a:solidFill>
@@ -10344,7 +10245,7 @@
               <a:t> và</a:t>
             </a:r>
             <a:r>
-              <a:rPr lang="en-US" sz="2400" dirty="0" spc="2" kern="0">
+              <a:rPr lang="en-US" sz="2550" dirty="0" spc="0" kern="0">
                 <a:solidFill>
                   <a:srgbClr val="14161C"/>
                 </a:solidFill>
@@ -10355,7 +10256,7 @@
               <a:t> hạn</a:t>
             </a:r>
             <a:r>
-              <a:rPr lang="en-US" sz="2400" dirty="0" spc="-18" kern="0">
+              <a:rPr lang="en-US" sz="2550" dirty="0" spc="-23" kern="0">
                 <a:solidFill>
                   <a:srgbClr val="14161C"/>
                 </a:solidFill>
@@ -10366,7 +10267,7 @@
               <a:t> xóa</a:t>
             </a:r>
             <a:r>
-              <a:rPr lang="en-US" sz="2400" dirty="0" spc="-13" kern="0">
+              <a:rPr lang="en-US" sz="2550" dirty="0" spc="-14" kern="0">
                 <a:solidFill>
                   <a:srgbClr val="14161C"/>
                 </a:solidFill>
@@ -10376,7 +10277,7 @@
               </a:rPr>
               <a:t> ngay.</a:t>
             </a:r>
-            <a:endParaRPr lang="en-US" sz="2400" dirty="0"/>
+            <a:endParaRPr lang="en-US" sz="2550" dirty="0"/>
           </a:p>
         </p:txBody>
       </p:sp>
@@ -12512,7 +12413,7 @@
               <a:buNone/>
             </a:pPr>
             <a:r>
-              <a:rPr lang="en-US" sz="2400" dirty="0" spc="-87" kern="0">
+              <a:rPr lang="en-US" sz="2550" dirty="0" spc="-93" kern="0">
                 <a:solidFill>
                   <a:srgbClr val="E8472B"/>
                 </a:solidFill>
@@ -12523,7 +12424,7 @@
               <a:t>Tắt</a:t>
             </a:r>
             <a:r>
-              <a:rPr lang="en-US" sz="2400" dirty="0" spc="0" kern="0">
+              <a:rPr lang="en-US" sz="2550" dirty="0" spc="1" kern="0">
                 <a:solidFill>
                   <a:srgbClr val="E8472B"/>
                 </a:solidFill>
@@ -12534,7 +12435,7 @@
               <a:t> cờ:</a:t>
             </a:r>
             <a:r>
-              <a:rPr lang="en-US" sz="2400" dirty="0" spc="4" kern="0">
+              <a:rPr lang="en-US" sz="2550" dirty="0" spc="-1" kern="0">
                 <a:solidFill>
                   <a:srgbClr val="E8472B"/>
                 </a:solidFill>
@@ -12545,7 +12446,7 @@
               <a:t> rút</a:t>
             </a:r>
             <a:r>
-              <a:rPr lang="en-US" sz="2400" dirty="0" spc="5" kern="0">
+              <a:rPr lang="en-US" sz="2550" dirty="0" spc="6" kern="0">
                 <a:solidFill>
                   <a:srgbClr val="E8472B"/>
                 </a:solidFill>
@@ -12555,7 +12456,7 @@
               </a:rPr>
               <a:t> được.</a:t>
             </a:r>
-            <a:endParaRPr lang="en-US" sz="2400" dirty="0"/>
+            <a:endParaRPr lang="en-US" sz="2550" dirty="0"/>
           </a:p>
         </p:txBody>
       </p:sp>
@@ -12694,7 +12595,7 @@
               <a:buNone/>
             </a:pPr>
             <a:r>
-              <a:rPr lang="en-US" sz="2400" dirty="0" spc="-36" kern="0">
+              <a:rPr lang="en-US" sz="2550" dirty="0" spc="-38" kern="0">
                 <a:solidFill>
                   <a:srgbClr val="6B6A66"/>
                 </a:solidFill>
@@ -12705,7 +12606,7 @@
               <a:t>Vẫn</a:t>
             </a:r>
             <a:r>
-              <a:rPr lang="en-US" sz="2400" dirty="0" spc="0" kern="0">
+              <a:rPr lang="en-US" sz="2550" dirty="0" spc="1" kern="0">
                 <a:solidFill>
                   <a:srgbClr val="6B6A66"/>
                 </a:solidFill>
@@ -12715,7 +12616,7 @@
               </a:rPr>
               <a:t> còn.</a:t>
             </a:r>
-            <a:endParaRPr lang="en-US" sz="2400" dirty="0"/>
+            <a:endParaRPr lang="en-US" sz="2550" dirty="0"/>
           </a:p>
         </p:txBody>
       </p:sp>
@@ -12843,7 +12744,7 @@
               <a:buNone/>
             </a:pPr>
             <a:r>
-              <a:rPr lang="en-US" sz="2400" dirty="0" spc="-36" kern="0">
+              <a:rPr lang="en-US" sz="2550" dirty="0" spc="-38" kern="0">
                 <a:solidFill>
                   <a:srgbClr val="6B6A66"/>
                 </a:solidFill>
@@ -12854,7 +12755,7 @@
               <a:t>Vẫn</a:t>
             </a:r>
             <a:r>
-              <a:rPr lang="en-US" sz="2400" dirty="0" spc="0" kern="0">
+              <a:rPr lang="en-US" sz="2550" dirty="0" spc="1" kern="0">
                 <a:solidFill>
                   <a:srgbClr val="6B6A66"/>
                 </a:solidFill>
@@ -12864,7 +12765,7 @@
               </a:rPr>
               <a:t> còn.</a:t>
             </a:r>
-            <a:endParaRPr lang="en-US" sz="2400" dirty="0"/>
+            <a:endParaRPr lang="en-US" sz="2550" dirty="0"/>
           </a:p>
         </p:txBody>
       </p:sp>
@@ -12959,7 +12860,7 @@
               <a:buNone/>
             </a:pPr>
             <a:r>
-              <a:rPr lang="en-US" sz="2400" dirty="0" spc="-36" kern="0">
+              <a:rPr lang="en-US" sz="2550" dirty="0" spc="-38" kern="0">
                 <a:solidFill>
                   <a:srgbClr val="6B6A66"/>
                 </a:solidFill>
@@ -12970,7 +12871,7 @@
               <a:t>Vẫn</a:t>
             </a:r>
             <a:r>
-              <a:rPr lang="en-US" sz="2400" dirty="0" spc="0" kern="0">
+              <a:rPr lang="en-US" sz="2550" dirty="0" spc="1" kern="0">
                 <a:solidFill>
                   <a:srgbClr val="6B6A66"/>
                 </a:solidFill>
@@ -12980,7 +12881,7 @@
               </a:rPr>
               <a:t> còn.</a:t>
             </a:r>
-            <a:endParaRPr lang="en-US" sz="2400" dirty="0"/>
+            <a:endParaRPr lang="en-US" sz="2550" dirty="0"/>
           </a:p>
         </p:txBody>
       </p:sp>
@@ -13063,17 +12964,17 @@
           <a:ln/>
         </p:spPr>
         <p:txBody>
-          <a:bodyPr wrap="square" lIns="0" tIns="5334" rIns="0" bIns="-5334" rtlCol="0" anchor="t"/>
+          <a:bodyPr wrap="square" lIns="0" tIns="5667" rIns="0" bIns="-5667" rtlCol="0" anchor="t"/>
           <a:lstStyle/>
           <a:p>
             <a:pPr algn="l" indent="0" marL="0">
               <a:lnSpc>
-                <a:spcPts val="3360"/>
+                <a:spcPts val="3570"/>
               </a:lnSpc>
               <a:buNone/>
             </a:pPr>
             <a:r>
-              <a:rPr lang="en-US" sz="2400" dirty="0" spc="-1" kern="0">
+              <a:rPr lang="en-US" sz="2550" dirty="0" spc="1" kern="0">
                 <a:solidFill>
                   <a:srgbClr val="F3EEE3"/>
                 </a:solidFill>
@@ -13084,7 +12985,7 @@
               <a:t>Muốn</a:t>
             </a:r>
             <a:r>
-              <a:rPr lang="en-US" sz="2400" dirty="0" spc="-17" kern="0">
+              <a:rPr lang="en-US" sz="2550" dirty="0" spc="-18" kern="0">
                 <a:solidFill>
                   <a:srgbClr val="F3EEE3"/>
                 </a:solidFill>
@@ -13095,7 +12996,7 @@
               <a:t> về</a:t>
             </a:r>
             <a:r>
-              <a:rPr lang="en-US" sz="2400" dirty="0" spc="-1" kern="0">
+              <a:rPr lang="en-US" sz="2550" dirty="0" spc="-2" kern="0">
                 <a:solidFill>
                   <a:srgbClr val="F3EEE3"/>
                 </a:solidFill>
@@ -13106,7 +13007,7 @@
               <a:t> như</a:t>
             </a:r>
             <a:r>
-              <a:rPr lang="en-US" sz="2400" dirty="0" spc="5" kern="0">
+              <a:rPr lang="en-US" sz="2550" dirty="0" spc="4" kern="0">
                 <a:solidFill>
                   <a:srgbClr val="F3EEE3"/>
                 </a:solidFill>
@@ -13117,7 +13018,7 @@
               <a:t> trước,</a:t>
             </a:r>
             <a:r>
-              <a:rPr lang="en-US" sz="2400" dirty="0" spc="4" kern="0">
+              <a:rPr lang="en-US" sz="2550" dirty="0" spc="0" kern="0">
                 <a:solidFill>
                   <a:srgbClr val="F3EEE3"/>
                 </a:solidFill>
@@ -13125,10 +13026,10 @@
                 <a:ea typeface="Be Vietnam Pro" pitchFamily="34" charset="-122"/>
                 <a:cs typeface="Be Vietnam Pro" pitchFamily="34" charset="-120"/>
               </a:rPr>
-              <a:t> rút</a:t>
-            </a:r>
-            <a:r>
-              <a:rPr lang="en-US" sz="2400" dirty="0" spc="1" kern="0">
+              <a:t> rút lại</a:t>
+            </a:r>
+            <a:r>
+              <a:rPr lang="en-US" sz="2550" dirty="0" spc="1" kern="0">
                 <a:solidFill>
                   <a:srgbClr val="F3EEE3"/>
                 </a:solidFill>
@@ -13136,10 +13037,10 @@
                 <a:ea typeface="Be Vietnam Pro" pitchFamily="34" charset="-122"/>
                 <a:cs typeface="Be Vietnam Pro" pitchFamily="34" charset="-120"/>
               </a:rPr>
-              <a:t> lại cả</a:t>
-            </a:r>
-            <a:r>
-              <a:rPr lang="en-US" sz="2400" dirty="0" spc="8" kern="0">
+              <a:t> cả</a:t>
+            </a:r>
+            <a:r>
+              <a:rPr lang="en-US" sz="2550" dirty="0" spc="9" kern="0">
                 <a:solidFill>
                   <a:srgbClr val="F3EEE3"/>
                 </a:solidFill>
@@ -13150,7 +13051,7 @@
               <a:t> triển</a:t>
             </a:r>
             <a:r>
-              <a:rPr lang="en-US" sz="2400" dirty="0" spc="-1" kern="0">
+              <a:rPr lang="en-US" sz="2550" dirty="0" spc="0" kern="0">
                 <a:solidFill>
                   <a:srgbClr val="F3EEE3"/>
                 </a:solidFill>
@@ -13160,7 +13061,7 @@
               </a:rPr>
               <a:t> khai.</a:t>
             </a:r>
-            <a:endParaRPr lang="en-US" sz="2400" dirty="0"/>
+            <a:endParaRPr lang="en-US" sz="2550" dirty="0"/>
           </a:p>
         </p:txBody>
       </p:sp>
@@ -13877,17 +13778,17 @@
           <a:ln/>
         </p:spPr>
         <p:txBody>
-          <a:bodyPr wrap="square" lIns="0" tIns="5001" rIns="0" bIns="-5001" rtlCol="0" anchor="t"/>
+          <a:bodyPr wrap="square" lIns="0" tIns="5667" rIns="0" bIns="-5667" rtlCol="0" anchor="t"/>
           <a:lstStyle/>
           <a:p>
             <a:pPr algn="l" indent="0" marL="0">
               <a:lnSpc>
-                <a:spcPts val="3150"/>
+                <a:spcPts val="3570"/>
               </a:lnSpc>
               <a:buNone/>
             </a:pPr>
             <a:r>
-              <a:rPr lang="en-US" sz="2250" dirty="0" spc="-4" kern="0">
+              <a:rPr lang="en-US" sz="2550" dirty="0" spc="-1" kern="0">
                 <a:solidFill>
                   <a:srgbClr val="E4E1D8"/>
                 </a:solidFill>
@@ -13898,7 +13799,7 @@
               <a:t>Giá</a:t>
             </a:r>
             <a:r>
-              <a:rPr lang="en-US" sz="2250" dirty="0" spc="10" kern="0">
+              <a:rPr lang="en-US" sz="2550" dirty="0" spc="14" kern="0">
                 <a:solidFill>
                   <a:srgbClr val="E4E1D8"/>
                 </a:solidFill>
@@ -13909,7 +13810,7 @@
               <a:t> trị</a:t>
             </a:r>
             <a:r>
-              <a:rPr lang="en-US" sz="2250" dirty="0" spc="5" kern="0">
+              <a:rPr lang="en-US" sz="2550" dirty="0" spc="-2" kern="0">
                 <a:solidFill>
                   <a:srgbClr val="E4E1D8"/>
                 </a:solidFill>
@@ -13920,7 +13821,7 @@
               <a:t> dự</a:t>
             </a:r>
             <a:r>
-              <a:rPr lang="en-US" sz="2250" dirty="0" spc="2" kern="0">
+              <a:rPr lang="en-US" sz="2550" dirty="0" spc="0" kern="0">
                 <a:solidFill>
                   <a:srgbClr val="E4E1D8"/>
                 </a:solidFill>
@@ -13931,7 +13832,7 @@
               <a:t> phòng</a:t>
             </a:r>
             <a:r>
-              <a:rPr lang="en-US" sz="2250" dirty="0" spc="-1" kern="0">
+              <a:rPr lang="en-US" sz="2550" dirty="0" spc="1" kern="0">
                 <a:solidFill>
                   <a:srgbClr val="E4E1D8"/>
                 </a:solidFill>
@@ -13942,7 +13843,7 @@
               <a:t> là</a:t>
             </a:r>
             <a:r>
-              <a:rPr lang="en-US" sz="2250" dirty="0" spc="0" kern="0">
+              <a:rPr lang="en-US" sz="2550" dirty="0" spc="0" kern="0">
                 <a:solidFill>
                   <a:srgbClr val="E4E1D8"/>
                 </a:solidFill>
@@ -13953,7 +13854,7 @@
               <a:t> hành</a:t>
             </a:r>
             <a:r>
-              <a:rPr lang="en-US" sz="2250" dirty="0" spc="-2" kern="0">
+              <a:rPr lang="en-US" sz="2550" dirty="0" spc="-4" kern="0">
                 <a:solidFill>
                   <a:srgbClr val="E4E1D8"/>
                 </a:solidFill>
@@ -13964,7 +13865,7 @@
               <a:t> vi</a:t>
             </a:r>
             <a:r>
-              <a:rPr lang="en-US" sz="2250" dirty="0" spc="5" kern="0">
+              <a:rPr lang="en-US" sz="2550" dirty="0" spc="0" kern="0">
                 <a:solidFill>
                   <a:srgbClr val="E4E1D8"/>
                 </a:solidFill>
@@ -13974,7 +13875,7 @@
               </a:rPr>
               <a:t> cũ.</a:t>
             </a:r>
-            <a:endParaRPr lang="en-US" sz="2250" dirty="0"/>
+            <a:endParaRPr lang="en-US" sz="2550" dirty="0"/>
           </a:p>
         </p:txBody>
       </p:sp>
@@ -14084,17 +13985,17 @@
           <a:ln/>
         </p:spPr>
         <p:txBody>
-          <a:bodyPr wrap="square" lIns="0" tIns="5001" rIns="0" bIns="-5001" rtlCol="0" anchor="t"/>
+          <a:bodyPr wrap="square" lIns="0" tIns="5667" rIns="0" bIns="-5667" rtlCol="0" anchor="t"/>
           <a:lstStyle/>
           <a:p>
             <a:pPr algn="l" indent="0" marL="0">
               <a:lnSpc>
-                <a:spcPts val="3150"/>
+                <a:spcPts val="3570"/>
               </a:lnSpc>
               <a:buNone/>
             </a:pPr>
             <a:r>
-              <a:rPr lang="en-US" sz="2250" dirty="0" spc="0" kern="0">
+              <a:rPr lang="en-US" sz="2550" dirty="0" spc="0" kern="0">
                 <a:solidFill>
                   <a:srgbClr val="E4E1D8"/>
                 </a:solidFill>
@@ -14105,7 +14006,7 @@
               <a:t>Chọn</a:t>
             </a:r>
             <a:r>
-              <a:rPr lang="en-US" sz="2250" dirty="0" spc="-3" kern="0">
+              <a:rPr lang="en-US" sz="2550" dirty="0" spc="-2" kern="0">
                 <a:solidFill>
                   <a:srgbClr val="E4E1D8"/>
                 </a:solidFill>
@@ -14116,7 +14017,7 @@
               <a:t> theo băm</a:t>
             </a:r>
             <a:r>
-              <a:rPr lang="en-US" sz="2250" dirty="0" spc="-1" kern="0">
+              <a:rPr lang="en-US" sz="2550" dirty="0" spc="1" kern="0">
                 <a:solidFill>
                   <a:srgbClr val="E4E1D8"/>
                 </a:solidFill>
@@ -14127,7 +14028,7 @@
               <a:t> mã</a:t>
             </a:r>
             <a:r>
-              <a:rPr lang="en-US" sz="2250" dirty="0" spc="19" kern="0">
+              <a:rPr lang="en-US" sz="2550" dirty="0" spc="21" kern="0">
                 <a:solidFill>
                   <a:srgbClr val="E4E1D8"/>
                 </a:solidFill>
@@ -14138,7 +14039,7 @@
               <a:t> định</a:t>
             </a:r>
             <a:r>
-              <a:rPr lang="en-US" sz="2250" dirty="0" spc="1" kern="0">
+              <a:rPr lang="en-US" sz="2550" dirty="0" spc="-1" kern="0">
                 <a:solidFill>
                   <a:srgbClr val="E4E1D8"/>
                 </a:solidFill>
@@ -14149,7 +14050,7 @@
               <a:t> danh</a:t>
             </a:r>
             <a:r>
-              <a:rPr lang="en-US" sz="2250" dirty="0" spc="5" kern="0">
+              <a:rPr lang="en-US" sz="2550" dirty="0" spc="5" kern="0">
                 <a:solidFill>
                   <a:srgbClr val="E4E1D8"/>
                 </a:solidFill>
@@ -14160,7 +14061,7 @@
               <a:t> người</a:t>
             </a:r>
             <a:r>
-              <a:rPr lang="en-US" sz="2250" dirty="0" spc="3" kern="0">
+              <a:rPr lang="en-US" sz="2550" dirty="0" spc="0" kern="0">
                 <a:solidFill>
                   <a:srgbClr val="E4E1D8"/>
                 </a:solidFill>
@@ -14170,7 +14071,7 @@
               </a:rPr>
               <a:t> dùng.</a:t>
             </a:r>
-            <a:endParaRPr lang="en-US" sz="2250" dirty="0"/>
+            <a:endParaRPr lang="en-US" sz="2550" dirty="0"/>
           </a:p>
         </p:txBody>
       </p:sp>
@@ -14269,17 +14170,17 @@
           <a:ln/>
         </p:spPr>
         <p:txBody>
-          <a:bodyPr wrap="square" lIns="0" tIns="5001" rIns="0" bIns="-5001" rtlCol="0" anchor="t"/>
+          <a:bodyPr wrap="square" lIns="0" tIns="5667" rIns="0" bIns="-5667" rtlCol="0" anchor="t"/>
           <a:lstStyle/>
           <a:p>
             <a:pPr algn="l" indent="0" marL="0">
               <a:lnSpc>
-                <a:spcPts val="3150"/>
+                <a:spcPts val="3570"/>
               </a:lnSpc>
               <a:buNone/>
             </a:pPr>
             <a:r>
-              <a:rPr lang="en-US" sz="2250" dirty="0" spc="-3" kern="0">
+              <a:rPr lang="en-US" sz="2550" dirty="0" spc="-1" kern="0">
                 <a:solidFill>
                   <a:srgbClr val="E4E1D8"/>
                 </a:solidFill>
@@ -14287,10 +14188,10 @@
                 <a:ea typeface="Be Vietnam Pro" pitchFamily="34" charset="-122"/>
                 <a:cs typeface="Be Vietnam Pro" pitchFamily="34" charset="-120"/>
               </a:rPr>
-              <a:t>Kiểm</a:t>
-            </a:r>
-            <a:r>
-              <a:rPr lang="en-US" sz="2250" dirty="0" spc="3" kern="0">
+              <a:t>Kiểm thử</a:t>
+            </a:r>
+            <a:r>
+              <a:rPr lang="en-US" sz="2550" dirty="0" spc="1" kern="0">
                 <a:solidFill>
                   <a:srgbClr val="E4E1D8"/>
                 </a:solidFill>
@@ -14298,10 +14199,10 @@
                 <a:ea typeface="Be Vietnam Pro" pitchFamily="34" charset="-122"/>
                 <a:cs typeface="Be Vietnam Pro" pitchFamily="34" charset="-120"/>
               </a:rPr>
-              <a:t> thử</a:t>
-            </a:r>
-            <a:r>
-              <a:rPr lang="en-US" sz="2250" dirty="0" spc="1" kern="0">
+              <a:t> cả</a:t>
+            </a:r>
+            <a:r>
+              <a:rPr lang="en-US" sz="2550" dirty="0" spc="0" kern="0">
                 <a:solidFill>
                   <a:srgbClr val="E4E1D8"/>
                 </a:solidFill>
@@ -14309,10 +14210,10 @@
                 <a:ea typeface="Be Vietnam Pro" pitchFamily="34" charset="-122"/>
                 <a:cs typeface="Be Vietnam Pro" pitchFamily="34" charset="-120"/>
               </a:rPr>
-              <a:t> cả</a:t>
-            </a:r>
-            <a:r>
-              <a:rPr lang="en-US" sz="2250" dirty="0" spc="4" kern="0">
+              <a:t> cờ</a:t>
+            </a:r>
+            <a:r>
+              <a:rPr lang="en-US" sz="2550" dirty="0" spc="-14" kern="0">
                 <a:solidFill>
                   <a:srgbClr val="E4E1D8"/>
                 </a:solidFill>
@@ -14320,10 +14221,32 @@
                 <a:ea typeface="Be Vietnam Pro" pitchFamily="34" charset="-122"/>
                 <a:cs typeface="Be Vietnam Pro" pitchFamily="34" charset="-120"/>
               </a:rPr>
+              <a:t> bật</a:t>
+            </a:r>
+            <a:r>
+              <a:rPr lang="en-US" sz="2550" dirty="0" spc="-19" kern="0">
+                <a:solidFill>
+                  <a:srgbClr val="E4E1D8"/>
+                </a:solidFill>
+                <a:latin typeface="Be Vietnam Pro" pitchFamily="34" charset="0"/>
+                <a:ea typeface="Be Vietnam Pro" pitchFamily="34" charset="-122"/>
+                <a:cs typeface="Be Vietnam Pro" pitchFamily="34" charset="-120"/>
+              </a:rPr>
+              <a:t> và</a:t>
+            </a:r>
+            <a:r>
+              <a:rPr lang="en-US" sz="2550" dirty="0" spc="0" kern="0">
+                <a:solidFill>
+                  <a:srgbClr val="E4E1D8"/>
+                </a:solidFill>
+                <a:latin typeface="Be Vietnam Pro" pitchFamily="34" charset="0"/>
+                <a:ea typeface="Be Vietnam Pro" pitchFamily="34" charset="-122"/>
+                <a:cs typeface="Be Vietnam Pro" pitchFamily="34" charset="-120"/>
+              </a:rPr>
               <a:t> cờ</a:t>
             </a:r>
             <a:r>
-              <a:rPr lang="en-US" sz="2250" dirty="0" spc="-13" kern="0">
+              <a:rPr lang="en-US" sz="2550" dirty="0" spc="-18" kern="0">
                 <a:solidFill>
                   <a:srgbClr val="E4E1D8"/>
                 </a:solidFill>
@@ -14331,42 +14254,9 @@
                 <a:ea typeface="Be Vietnam Pro" pitchFamily="34" charset="-122"/>
                 <a:cs typeface="Be Vietnam Pro" pitchFamily="34" charset="-120"/>
               </a:rPr>
-              <a:t> bật</a:t>
-            </a:r>
-            <a:r>
-              <a:rPr lang="en-US" sz="2250" dirty="0" spc="-16" kern="0">
-                <a:solidFill>
-                  <a:srgbClr val="E4E1D8"/>
-                </a:solidFill>
-                <a:latin typeface="Be Vietnam Pro" pitchFamily="34" charset="0"/>
-                <a:ea typeface="Be Vietnam Pro" pitchFamily="34" charset="-122"/>
-                <a:cs typeface="Be Vietnam Pro" pitchFamily="34" charset="-120"/>
-              </a:rPr>
-              <a:t> và</a:t>
-            </a:r>
-            <a:r>
-              <a:rPr lang="en-US" sz="2250" dirty="0" spc="4" kern="0">
-                <a:solidFill>
-                  <a:srgbClr val="E4E1D8"/>
-                </a:solidFill>
-                <a:latin typeface="Be Vietnam Pro" pitchFamily="34" charset="0"/>
-                <a:ea typeface="Be Vietnam Pro" pitchFamily="34" charset="-122"/>
-                <a:cs typeface="Be Vietnam Pro" pitchFamily="34" charset="-120"/>
-              </a:rPr>
-              <a:t> cờ</a:t>
-            </a:r>
-            <a:r>
-              <a:rPr lang="en-US" sz="2250" dirty="0" spc="-17" kern="0">
-                <a:solidFill>
-                  <a:srgbClr val="E4E1D8"/>
-                </a:solidFill>
-                <a:latin typeface="Be Vietnam Pro" pitchFamily="34" charset="0"/>
-                <a:ea typeface="Be Vietnam Pro" pitchFamily="34" charset="-122"/>
-                <a:cs typeface="Be Vietnam Pro" pitchFamily="34" charset="-120"/>
-              </a:rPr>
               <a:t> tắt.</a:t>
             </a:r>
-            <a:endParaRPr lang="en-US" sz="2250" dirty="0"/>
+            <a:endParaRPr lang="en-US" sz="2550" dirty="0"/>
           </a:p>
         </p:txBody>
       </p:sp>
@@ -14465,17 +14355,17 @@
           <a:ln/>
         </p:spPr>
         <p:txBody>
-          <a:bodyPr wrap="square" lIns="0" tIns="5001" rIns="0" bIns="-5001" rtlCol="0" anchor="t"/>
+          <a:bodyPr wrap="square" lIns="0" tIns="5667" rIns="0" bIns="-5667" rtlCol="0" anchor="t"/>
           <a:lstStyle/>
           <a:p>
             <a:pPr algn="l" indent="0" marL="0">
               <a:lnSpc>
-                <a:spcPts val="3150"/>
+                <a:spcPts val="3570"/>
               </a:lnSpc>
               <a:buNone/>
             </a:pPr>
             <a:r>
-              <a:rPr lang="en-US" sz="2250" dirty="0" spc="-13" kern="0">
+              <a:rPr lang="en-US" sz="2550" dirty="0" spc="-10" kern="0">
                 <a:solidFill>
                   <a:srgbClr val="E4E1D8"/>
                 </a:solidFill>
@@ -14486,7 +14376,7 @@
               <a:t>Phát</a:t>
             </a:r>
             <a:r>
-              <a:rPr lang="en-US" sz="2250" dirty="0" spc="0" kern="0">
+              <a:rPr lang="en-US" sz="2550" dirty="0" spc="0" kern="0">
                 <a:solidFill>
                   <a:srgbClr val="E4E1D8"/>
                 </a:solidFill>
@@ -14497,7 +14387,7 @@
               <a:t> hành</a:t>
             </a:r>
             <a:r>
-              <a:rPr lang="en-US" sz="2250" dirty="0" spc="-9" kern="0">
+              <a:rPr lang="en-US" sz="2550" dirty="0" spc="-10" kern="0">
                 <a:solidFill>
                   <a:srgbClr val="E4E1D8"/>
                 </a:solidFill>
@@ -14508,7 +14398,7 @@
               <a:t> ngắn</a:t>
             </a:r>
             <a:r>
-              <a:rPr lang="en-US" sz="2250" dirty="0" spc="-1" kern="0">
+              <a:rPr lang="en-US" sz="2550" dirty="0" spc="-1" kern="0">
                 <a:solidFill>
                   <a:srgbClr val="E4E1D8"/>
                 </a:solidFill>
@@ -14519,7 +14409,7 @@
               <a:t> hạn;</a:t>
             </a:r>
             <a:r>
-              <a:rPr lang="en-US" sz="2250" dirty="0" spc="-12" kern="0">
+              <a:rPr lang="en-US" sz="2550" dirty="0" spc="-14" kern="0">
                 <a:solidFill>
                   <a:srgbClr val="E4E1D8"/>
                 </a:solidFill>
@@ -14530,7 +14420,7 @@
               <a:t> vận</a:t>
             </a:r>
             <a:r>
-              <a:rPr lang="en-US" sz="2250" dirty="0" spc="0" kern="0">
+              <a:rPr lang="en-US" sz="2550" dirty="0" spc="0" kern="0">
                 <a:solidFill>
                   <a:srgbClr val="E4E1D8"/>
                 </a:solidFill>
@@ -14541,7 +14431,7 @@
               <a:t> hành</a:t>
             </a:r>
             <a:r>
-              <a:rPr lang="en-US" sz="2250" dirty="0" spc="-2" kern="0">
+              <a:rPr lang="en-US" sz="2550" dirty="0" spc="-6" kern="0">
                 <a:solidFill>
                   <a:srgbClr val="E4E1D8"/>
                 </a:solidFill>
@@ -14552,7 +14442,7 @@
               <a:t> sống</a:t>
             </a:r>
             <a:r>
-              <a:rPr lang="en-US" sz="2250" dirty="0" spc="-1" kern="0">
+              <a:rPr lang="en-US" sz="2550" dirty="0" spc="1" kern="0">
                 <a:solidFill>
                   <a:srgbClr val="E4E1D8"/>
                 </a:solidFill>
@@ -14563,7 +14453,7 @@
               <a:t> lâu</a:t>
             </a:r>
             <a:r>
-              <a:rPr lang="en-US" sz="2250" dirty="0" spc="1" kern="0">
+              <a:rPr lang="en-US" sz="2550" dirty="0" spc="0" kern="0">
                 <a:solidFill>
                   <a:srgbClr val="E4E1D8"/>
                 </a:solidFill>
@@ -14573,7 +14463,7 @@
               </a:rPr>
               <a:t> hơn.</a:t>
             </a:r>
-            <a:endParaRPr lang="en-US" sz="2250" dirty="0"/>
+            <a:endParaRPr lang="en-US" sz="2550" dirty="0"/>
           </a:p>
         </p:txBody>
       </p:sp>
@@ -14661,17 +14551,17 @@
           <a:ln/>
         </p:spPr>
         <p:txBody>
-          <a:bodyPr wrap="square" lIns="0" tIns="5001" rIns="0" bIns="-5001" rtlCol="0" anchor="t"/>
+          <a:bodyPr wrap="square" lIns="0" tIns="5667" rIns="0" bIns="-5667" rtlCol="0" anchor="t"/>
           <a:lstStyle/>
           <a:p>
             <a:pPr algn="l" indent="0" marL="0">
               <a:lnSpc>
-                <a:spcPts val="3150"/>
+                <a:spcPts val="3570"/>
               </a:lnSpc>
               <a:buNone/>
             </a:pPr>
             <a:r>
-              <a:rPr lang="en-US" sz="2250" dirty="0" spc="4" kern="0">
+              <a:rPr lang="en-US" sz="2550" dirty="0" spc="7" kern="0">
                 <a:solidFill>
                   <a:srgbClr val="E4E1D8"/>
                 </a:solidFill>
@@ -14682,7 +14572,7 @@
               <a:t>Người</a:t>
             </a:r>
             <a:r>
-              <a:rPr lang="en-US" sz="2250" dirty="0" spc="1" kern="0">
+              <a:rPr lang="en-US" sz="2550" dirty="0" spc="2" kern="0">
                 <a:solidFill>
                   <a:srgbClr val="E4E1D8"/>
                 </a:solidFill>
@@ -14693,7 +14583,7 @@
               <a:t> chịu</a:t>
             </a:r>
             <a:r>
-              <a:rPr lang="en-US" sz="2250" dirty="0" spc="-15" kern="0">
+              <a:rPr lang="en-US" sz="2550" dirty="0" spc="-16" kern="0">
                 <a:solidFill>
                   <a:srgbClr val="E4E1D8"/>
                 </a:solidFill>
@@ -14704,7 +14594,7 @@
               <a:t> trách</a:t>
             </a:r>
             <a:r>
-              <a:rPr lang="en-US" sz="2250" dirty="0" spc="-2" kern="0">
+              <a:rPr lang="en-US" sz="2550" dirty="0" spc="0" kern="0">
                 <a:solidFill>
                   <a:srgbClr val="E4E1D8"/>
                 </a:solidFill>
@@ -14715,7 +14605,7 @@
               <a:t> nhiệm</a:t>
             </a:r>
             <a:r>
-              <a:rPr lang="en-US" sz="2250" dirty="0" spc="-16" kern="0">
+              <a:rPr lang="en-US" sz="2550" dirty="0" spc="-19" kern="0">
                 <a:solidFill>
                   <a:srgbClr val="E4E1D8"/>
                 </a:solidFill>
@@ -14726,7 +14616,7 @@
               <a:t> và</a:t>
             </a:r>
             <a:r>
-              <a:rPr lang="en-US" sz="2250" dirty="0" spc="0" kern="0">
+              <a:rPr lang="en-US" sz="2550" dirty="0" spc="0" kern="0">
                 <a:solidFill>
                   <a:srgbClr val="E4E1D8"/>
                 </a:solidFill>
@@ -14737,7 +14627,7 @@
               <a:t> hạn</a:t>
             </a:r>
             <a:r>
-              <a:rPr lang="en-US" sz="2250" dirty="0" spc="-20" kern="0">
+              <a:rPr lang="en-US" sz="2550" dirty="0" spc="-23" kern="0">
                 <a:solidFill>
                   <a:srgbClr val="E4E1D8"/>
                 </a:solidFill>
@@ -14748,7 +14638,7 @@
               <a:t> xóa</a:t>
             </a:r>
             <a:r>
-              <a:rPr lang="en-US" sz="2250" dirty="0" spc="4" kern="0">
+              <a:rPr lang="en-US" sz="2550" dirty="0" spc="0" kern="0">
                 <a:solidFill>
                   <a:srgbClr val="E4E1D8"/>
                 </a:solidFill>
@@ -14759,7 +14649,7 @@
               <a:t> từ</a:t>
             </a:r>
             <a:r>
-              <a:rPr lang="en-US" sz="2250" dirty="0" spc="10" kern="0">
+              <a:rPr lang="en-US" sz="2550" dirty="0" spc="13" kern="0">
                 <a:solidFill>
                   <a:srgbClr val="E4E1D8"/>
                 </a:solidFill>
@@ -14769,7 +14659,7 @@
               </a:rPr>
               <a:t> đầu.</a:t>
             </a:r>
-            <a:endParaRPr lang="en-US" sz="2250" dirty="0"/>
+            <a:endParaRPr lang="en-US" sz="2550" dirty="0"/>
           </a:p>
         </p:txBody>
       </p:sp>

--- a/system-design-101/vi/lessons/sd-13-015/slides/sd-13-015.pptx
+++ b/system-design-101/vi/lessons/sd-13-015/slides/sd-13-015.pptx
@@ -7635,7 +7635,7 @@
               <a:t> cùng</a:t>
             </a:r>
             <a:r>
-              <a:rPr lang="en-US" sz="2550" dirty="0" spc="-5" kern="0">
+              <a:rPr lang="en-US" sz="2550" dirty="0" spc="0" kern="0">
                 <a:solidFill>
                   <a:srgbClr val="E4E1D8"/>
                 </a:solidFill>
@@ -7643,10 +7643,10 @@
                 <a:ea typeface="Be Vietnam Pro" pitchFamily="34" charset="-122"/>
                 <a:cs typeface="Be Vietnam Pro" pitchFamily="34" charset="-120"/>
               </a:rPr>
-              <a:t> một</a:t>
-            </a:r>
-            <a:r>
-              <a:rPr lang="en-US" sz="2550" dirty="0" spc="-1" kern="0">
+              <a:t> phiên</a:t>
+            </a:r>
+            <a:r>
+              <a:rPr lang="en-US" sz="2550" dirty="0" spc="-4" kern="0">
                 <a:solidFill>
                   <a:srgbClr val="E4E1D8"/>
                 </a:solidFill>
@@ -7654,10 +7654,10 @@
                 <a:ea typeface="Be Vietnam Pro" pitchFamily="34" charset="-122"/>
                 <a:cs typeface="Be Vietnam Pro" pitchFamily="34" charset="-120"/>
               </a:rPr>
-              <a:t> phiên</a:t>
-            </a:r>
-            <a:r>
-              <a:rPr lang="en-US" sz="2550" dirty="0" spc="-2" kern="0">
+              <a:t> bản</a:t>
+            </a:r>
+            <a:r>
+              <a:rPr lang="en-US" sz="2550" dirty="0" spc="1" kern="0">
                 <a:solidFill>
                   <a:srgbClr val="E4E1D8"/>
                 </a:solidFill>
@@ -7665,10 +7665,10 @@
                 <a:ea typeface="Be Vietnam Pro" pitchFamily="34" charset="-122"/>
                 <a:cs typeface="Be Vietnam Pro" pitchFamily="34" charset="-120"/>
               </a:rPr>
-              <a:t> bản</a:t>
-            </a:r>
-            <a:r>
-              <a:rPr lang="en-US" sz="2550" dirty="0" spc="1" kern="0">
+              <a:t> qua các</a:t>
+            </a:r>
+            <a:r>
+              <a:rPr lang="en-US" sz="2550" dirty="0" spc="0" kern="0">
                 <a:solidFill>
                   <a:srgbClr val="E4E1D8"/>
                 </a:solidFill>
@@ -7676,32 +7676,10 @@
                 <a:ea typeface="Be Vietnam Pro" pitchFamily="34" charset="-122"/>
                 <a:cs typeface="Be Vietnam Pro" pitchFamily="34" charset="-120"/>
               </a:rPr>
-              <a:t> qua</a:t>
-            </a:r>
-            <a:r>
-              <a:rPr lang="en-US" sz="2550" dirty="0" spc="0" kern="0">
-                <a:solidFill>
-                  <a:srgbClr val="E4E1D8"/>
-                </a:solidFill>
-                <a:latin typeface="Be Vietnam Pro" pitchFamily="34" charset="0"/>
-                <a:ea typeface="Be Vietnam Pro" pitchFamily="34" charset="-122"/>
-                <a:cs typeface="Be Vietnam Pro" pitchFamily="34" charset="-120"/>
-              </a:rPr>
-              <a:t> các</a:t>
-            </a:r>
-            <a:r>
-              <a:rPr lang="en-US" sz="2550" dirty="0" spc="1" kern="0">
-                <a:solidFill>
-                  <a:srgbClr val="E4E1D8"/>
-                </a:solidFill>
-                <a:latin typeface="Be Vietnam Pro" pitchFamily="34" charset="0"/>
-                <a:ea typeface="Be Vietnam Pro" pitchFamily="34" charset="-122"/>
-                <a:cs typeface="Be Vietnam Pro" pitchFamily="34" charset="-120"/>
-              </a:rPr>
               <a:t> lần</a:t>
             </a:r>
             <a:r>
-              <a:rPr lang="en-US" sz="2550" dirty="0" spc="-9" kern="0">
+              <a:rPr lang="en-US" sz="2550" dirty="0" spc="-8" kern="0">
                 <a:solidFill>
                   <a:srgbClr val="E4E1D8"/>
                 </a:solidFill>
@@ -11551,32 +11529,10 @@
                 <a:ea typeface="Be Vietnam Pro" pitchFamily="34" charset="-122"/>
                 <a:cs typeface="Be Vietnam Pro" pitchFamily="34" charset="-120"/>
               </a:rPr>
-              <a:t> hai</a:t>
-            </a:r>
-            <a:r>
-              <a:rPr lang="en-US" sz="2550" b="1" dirty="0" spc="1" kern="0">
-                <a:solidFill>
-                  <a:srgbClr val="F3EEE3"/>
-                </a:solidFill>
-                <a:latin typeface="Be Vietnam Pro" pitchFamily="34" charset="0"/>
-                <a:ea typeface="Be Vietnam Pro" pitchFamily="34" charset="-122"/>
-                <a:cs typeface="Be Vietnam Pro" pitchFamily="34" charset="-120"/>
-              </a:rPr>
-              <a:t> chiều</a:t>
-            </a:r>
-            <a:r>
-              <a:rPr lang="en-US" sz="2550" b="1" dirty="0" spc="-20" kern="0">
-                <a:solidFill>
-                  <a:srgbClr val="F3EEE3"/>
-                </a:solidFill>
-                <a:latin typeface="Be Vietnam Pro" pitchFamily="34" charset="0"/>
-                <a:ea typeface="Be Vietnam Pro" pitchFamily="34" charset="-122"/>
-                <a:cs typeface="Be Vietnam Pro" pitchFamily="34" charset="-120"/>
-              </a:rPr>
-              <a:t> và</a:t>
-            </a:r>
-            <a:r>
-              <a:rPr lang="en-US" sz="2550" b="1" dirty="0" spc="-33" kern="0">
+              <a:t> hai chiều,</a:t>
+            </a:r>
+            <a:r>
+              <a:rPr lang="en-US" sz="2550" b="1" dirty="0" spc="-32" kern="0">
                 <a:solidFill>
                   <a:srgbClr val="F3EEE3"/>
                 </a:solidFill>

--- a/system-design-101/vi/lessons/sd-13-015/slides/sd-13-015.pptx
+++ b/system-design-101/vi/lessons/sd-13-015/slides/sd-13-015.pptx
@@ -2143,7 +2143,7 @@
               <a:buNone/>
             </a:pPr>
             <a:r>
-              <a:rPr lang="en-US" sz="2496" dirty="0" spc="1" kern="0">
+              <a:rPr lang="en-US" sz="2550" dirty="0" kern="0">
                 <a:solidFill>
                   <a:srgbClr val="FF6A4D"/>
                 </a:solidFill>
@@ -2153,7 +2153,7 @@
               </a:rPr>
               <a:t>1</a:t>
             </a:r>
-            <a:endParaRPr lang="en-US" sz="2496" dirty="0"/>
+            <a:endParaRPr lang="en-US" sz="2550" dirty="0"/>
           </a:p>
         </p:txBody>
       </p:sp>
@@ -2264,7 +2264,7 @@
               <a:buNone/>
             </a:pPr>
             <a:r>
-              <a:rPr lang="en-US" sz="2496" dirty="0" spc="-5" kern="0">
+              <a:rPr lang="en-US" sz="2550" dirty="0" spc="6" kern="0">
                 <a:solidFill>
                   <a:srgbClr val="FF6A4D"/>
                 </a:solidFill>
@@ -2274,7 +2274,7 @@
               </a:rPr>
               <a:t>2</a:t>
             </a:r>
-            <a:endParaRPr lang="en-US" sz="2496" dirty="0"/>
+            <a:endParaRPr lang="en-US" sz="2550" dirty="0"/>
           </a:p>
         </p:txBody>
       </p:sp>
@@ -2352,7 +2352,7 @@
               <a:buNone/>
             </a:pPr>
             <a:r>
-              <a:rPr lang="en-US" sz="2496" dirty="0" spc="2" kern="0">
+              <a:rPr lang="en-US" sz="2550" dirty="0" spc="2" kern="0">
                 <a:solidFill>
                   <a:srgbClr val="7C93FF"/>
                 </a:solidFill>
@@ -2362,7 +2362,7 @@
               </a:rPr>
               <a:t>3</a:t>
             </a:r>
-            <a:endParaRPr lang="en-US" sz="2496" dirty="0"/>
+            <a:endParaRPr lang="en-US" sz="2550" dirty="0"/>
           </a:p>
         </p:txBody>
       </p:sp>
@@ -2451,7 +2451,7 @@
               <a:buNone/>
             </a:pPr>
             <a:r>
-              <a:rPr lang="en-US" sz="2496" dirty="0" spc="5" kern="0">
+              <a:rPr lang="en-US" sz="2550" dirty="0" spc="6" kern="0">
                 <a:solidFill>
                   <a:srgbClr val="FFB454"/>
                 </a:solidFill>
@@ -2461,7 +2461,7 @@
               </a:rPr>
               <a:t>4</a:t>
             </a:r>
-            <a:endParaRPr lang="en-US" sz="2496" dirty="0"/>
+            <a:endParaRPr lang="en-US" sz="2550" dirty="0"/>
           </a:p>
         </p:txBody>
       </p:sp>
@@ -2550,7 +2550,7 @@
               <a:buNone/>
             </a:pPr>
             <a:r>
-              <a:rPr lang="en-US" sz="2496" dirty="0" spc="-5" kern="0">
+              <a:rPr lang="en-US" sz="2550" dirty="0" spc="-6" kern="0">
                 <a:solidFill>
                   <a:srgbClr val="3DD6A0"/>
                 </a:solidFill>
@@ -2560,7 +2560,7 @@
               </a:rPr>
               <a:t>5</a:t>
             </a:r>
-            <a:endParaRPr lang="en-US" sz="2496" dirty="0"/>
+            <a:endParaRPr lang="en-US" sz="2550" dirty="0"/>
           </a:p>
         </p:txBody>
       </p:sp>

--- a/system-design-101/vi/lessons/sd-13-015/slides/sd-13-015.pptx
+++ b/system-design-101/vi/lessons/sd-13-015/slides/sd-13-015.pptx
@@ -2916,7 +2916,7 @@
                 <a:gridCol w="3621024"/>
                 <a:gridCol w="12838176"/>
               </a:tblGrid>
-              <a:tr h="1047750">
+              <a:tr h="838200">
                 <a:tc>
                   <a:txBody>
                     <a:bodyPr/>
@@ -2942,7 +2942,7 @@
                       <a:endParaRPr lang="en-US" sz="1200" dirty="0"/>
                     </a:p>
                   </a:txBody>
-                  <a:tcPr marL="304800" marR="304800" marT="304800" marB="304800" anchor="ctr">
+                  <a:tcPr marL="304800" marR="304800" marT="236220" marB="236220" anchor="ctr">
                     <a:lnL w="0" cap="flat" cmpd="sng" algn="ctr">
                       <a:noFill/>
                     </a:lnL>
@@ -2996,7 +2996,7 @@
                       <a:endParaRPr lang="en-US" sz="1200" dirty="0"/>
                     </a:p>
                   </a:txBody>
-                  <a:tcPr marL="304800" marR="304800" marT="304800" marB="304800" anchor="ctr">
+                  <a:tcPr marL="304800" marR="304800" marT="236220" marB="236220" anchor="ctr">
                     <a:lnL w="19050" cap="flat" cmpd="sng" algn="ctr">
                       <a:solidFill>
                         <a:srgbClr val="3A3F4D"/>
@@ -3021,7 +3021,7 @@
                   </a:tcPr>
                 </a:tc>
               </a:tr>
-              <a:tr h="1047750">
+              <a:tr h="838200">
                 <a:tc>
                   <a:txBody>
                     <a:bodyPr/>
@@ -3034,7 +3034,7 @@
                         <a:buNone/>
                       </a:pPr>
                       <a:r>
-                        <a:rPr lang="en-US" sz="2400" dirty="0" spc="-10" kern="0">
+                        <a:rPr lang="en-US" sz="2400" dirty="0" spc="0" kern="0">
                           <a:solidFill>
                             <a:srgbClr val="F3EEE3"/>
                           </a:solidFill>
@@ -3042,10 +3042,10 @@
                           <a:ea typeface="Be Vietnam Pro" pitchFamily="34" charset="-122"/>
                           <a:cs typeface="Be Vietnam Pro" pitchFamily="34" charset="-120"/>
                         </a:rPr>
-                        <a:t>Thuật</a:t>
+                        <a:t>Cờ</a:t>
                       </a:r>
                       <a:r>
-                        <a:rPr lang="en-US" sz="2400" dirty="0" spc="4" kern="0">
+                        <a:rPr lang="en-US" sz="2400" dirty="0" spc="-8" kern="0">
                           <a:solidFill>
                             <a:srgbClr val="F3EEE3"/>
                           </a:solidFill>
@@ -3053,12 +3053,23 @@
                           <a:ea typeface="Be Vietnam Pro" pitchFamily="34" charset="-122"/>
                           <a:cs typeface="Be Vietnam Pro" pitchFamily="34" charset="-120"/>
                         </a:rPr>
-                        <a:t> ngữ</a:t>
+                        <a:t> phát</a:t>
+                      </a:r>
+                      <a:r>
+                        <a:rPr lang="en-US" sz="2400" dirty="0" spc="2" kern="0">
+                          <a:solidFill>
+                            <a:srgbClr val="F3EEE3"/>
+                          </a:solidFill>
+                          <a:latin typeface="Be Vietnam Pro" pitchFamily="34" charset="0"/>
+                          <a:ea typeface="Be Vietnam Pro" pitchFamily="34" charset="-122"/>
+                          <a:cs typeface="Be Vietnam Pro" pitchFamily="34" charset="-120"/>
+                        </a:rPr>
+                        <a:t> hành</a:t>
                       </a:r>
                       <a:endParaRPr lang="en-US" sz="1200" dirty="0"/>
                     </a:p>
                   </a:txBody>
-                  <a:tcPr marL="304800" marR="304800" marT="304800" marB="304800" anchor="ctr">
+                  <a:tcPr marL="304800" marR="304800" marT="236220" marB="236220" anchor="ctr">
                     <a:lnL w="0" cap="flat" cmpd="sng" algn="ctr">
                       <a:noFill/>
                     </a:lnL>
@@ -3094,7 +3105,7 @@
                         <a:buNone/>
                       </a:pPr>
                       <a:r>
-                        <a:rPr lang="en-US" sz="2400" dirty="0" spc="2" kern="0">
+                        <a:rPr lang="en-US" sz="2400" dirty="0" spc="6" kern="0">
                           <a:solidFill>
                             <a:srgbClr val="F3EEE3"/>
                           </a:solidFill>
@@ -3102,7 +3113,7 @@
                           <a:ea typeface="Be Vietnam Pro" pitchFamily="34" charset="-122"/>
                           <a:cs typeface="Be Vietnam Pro" pitchFamily="34" charset="-120"/>
                         </a:rPr>
-                        <a:t>Bài</a:t>
+                        <a:t>Thường</a:t>
                       </a:r>
                       <a:r>
                         <a:rPr lang="en-US" sz="2400" dirty="0" spc="-7" kern="0">
@@ -3113,10 +3124,10 @@
                           <a:ea typeface="Be Vietnam Pro" pitchFamily="34" charset="-122"/>
                           <a:cs typeface="Be Vietnam Pro" pitchFamily="34" charset="-120"/>
                         </a:rPr>
-                        <a:t> này</a:t>
+                        <a:t> ngắn</a:t>
                       </a:r>
                       <a:r>
-                        <a:rPr lang="en-US" sz="2400" dirty="0" spc="0" kern="0">
+                        <a:rPr lang="en-US" sz="2400" dirty="0" spc="2" kern="0">
                           <a:solidFill>
                             <a:srgbClr val="F3EEE3"/>
                           </a:solidFill>
@@ -3124,10 +3135,10 @@
                           <a:ea typeface="Be Vietnam Pro" pitchFamily="34" charset="-122"/>
                           <a:cs typeface="Be Vietnam Pro" pitchFamily="34" charset="-120"/>
                         </a:rPr>
-                        <a:t> không</a:t>
+                        <a:t> hạn,</a:t>
                       </a:r>
                       <a:r>
-                        <a:rPr lang="en-US" sz="2400" dirty="0" spc="1" kern="0">
+                        <a:rPr lang="en-US" sz="2400" dirty="0" spc="-19" kern="0">
                           <a:solidFill>
                             <a:srgbClr val="F3EEE3"/>
                           </a:solidFill>
@@ -3135,10 +3146,10 @@
                           <a:ea typeface="Be Vietnam Pro" pitchFamily="34" charset="-122"/>
                           <a:cs typeface="Be Vietnam Pro" pitchFamily="34" charset="-120"/>
                         </a:rPr>
-                        <a:t> có</a:t>
+                        <a:t> xóa</a:t>
                       </a:r>
                       <a:r>
-                        <a:rPr lang="en-US" sz="2400" dirty="0" spc="3" kern="0">
+                        <a:rPr lang="en-US" sz="2400" dirty="0" spc="-7" kern="0">
                           <a:solidFill>
                             <a:srgbClr val="F3EEE3"/>
                           </a:solidFill>
@@ -3146,7 +3157,29 @@
                           <a:ea typeface="Be Vietnam Pro" pitchFamily="34" charset="-122"/>
                           <a:cs typeface="Be Vietnam Pro" pitchFamily="34" charset="-120"/>
                         </a:rPr>
-                        <a:t> từ</a:t>
+                        <a:t> sau</a:t>
+                      </a:r>
+                      <a:r>
+                        <a:rPr lang="en-US" sz="2400" dirty="0" spc="-2" kern="0">
+                          <a:solidFill>
+                            <a:srgbClr val="F3EEE3"/>
+                          </a:solidFill>
+                          <a:latin typeface="Be Vietnam Pro" pitchFamily="34" charset="0"/>
+                          <a:ea typeface="Be Vietnam Pro" pitchFamily="34" charset="-122"/>
+                          <a:cs typeface="Be Vietnam Pro" pitchFamily="34" charset="-120"/>
+                        </a:rPr>
+                        <a:t> khi</a:t>
+                      </a:r>
+                      <a:r>
+                        <a:rPr lang="en-US" sz="2400" dirty="0" spc="4" kern="0">
+                          <a:solidFill>
+                            <a:srgbClr val="F3EEE3"/>
+                          </a:solidFill>
+                          <a:latin typeface="Be Vietnam Pro" pitchFamily="34" charset="0"/>
+                          <a:ea typeface="Be Vietnam Pro" pitchFamily="34" charset="-122"/>
+                          <a:cs typeface="Be Vietnam Pro" pitchFamily="34" charset="-120"/>
+                        </a:rPr>
+                        <a:t> mở</a:t>
                       </a:r>
                       <a:r>
                         <a:rPr lang="en-US" sz="2400" dirty="0" spc="-6" kern="0">
@@ -3157,45 +3190,12 @@
                           <a:ea typeface="Be Vietnam Pro" pitchFamily="34" charset="-122"/>
                           <a:cs typeface="Be Vietnam Pro" pitchFamily="34" charset="-120"/>
                         </a:rPr>
-                        <a:t> viết</a:t>
-                      </a:r>
-                      <a:r>
-                        <a:rPr lang="en-US" sz="2400" dirty="0" spc="-21" kern="0">
-                          <a:solidFill>
-                            <a:srgbClr val="F3EEE3"/>
-                          </a:solidFill>
-                          <a:latin typeface="Be Vietnam Pro" pitchFamily="34" charset="0"/>
-                          <a:ea typeface="Be Vietnam Pro" pitchFamily="34" charset="-122"/>
-                          <a:cs typeface="Be Vietnam Pro" pitchFamily="34" charset="-120"/>
-                        </a:rPr>
-                        <a:t> tắt</a:t>
-                      </a:r>
-                      <a:r>
-                        <a:rPr lang="en-US" sz="2400" dirty="0" spc="1" kern="0">
-                          <a:solidFill>
-                            <a:srgbClr val="F3EEE3"/>
-                          </a:solidFill>
-                          <a:latin typeface="Be Vietnam Pro" pitchFamily="34" charset="0"/>
-                          <a:ea typeface="Be Vietnam Pro" pitchFamily="34" charset="-122"/>
-                          <a:cs typeface="Be Vietnam Pro" pitchFamily="34" charset="-120"/>
-                        </a:rPr>
-                        <a:t> cần giải</a:t>
-                      </a:r>
-                      <a:r>
-                        <a:rPr lang="en-US" sz="2400" dirty="0" spc="0" kern="0">
-                          <a:solidFill>
-                            <a:srgbClr val="F3EEE3"/>
-                          </a:solidFill>
-                          <a:latin typeface="Be Vietnam Pro" pitchFamily="34" charset="0"/>
-                          <a:ea typeface="Be Vietnam Pro" pitchFamily="34" charset="-122"/>
-                          <a:cs typeface="Be Vietnam Pro" pitchFamily="34" charset="-120"/>
-                        </a:rPr>
-                        <a:t> thích</a:t>
+                        <a:t> hết</a:t>
                       </a:r>
                       <a:endParaRPr lang="en-US" sz="1200" dirty="0"/>
                     </a:p>
                   </a:txBody>
-                  <a:tcPr marL="304800" marR="304800" marT="304800" marB="304800" anchor="ctr">
+                  <a:tcPr marL="304800" marR="304800" marT="236220" marB="236220" anchor="ctr">
                     <a:lnL w="19050" cap="flat" cmpd="sng" algn="ctr">
                       <a:solidFill>
                         <a:srgbClr val="3A3F4D"/>
@@ -3226,7 +3226,201 @@
                   </a:tcPr>
                 </a:tc>
               </a:tr>
-              <a:tr h="1047750">
+              <a:tr h="838200">
+                <a:tc>
+                  <a:txBody>
+                    <a:bodyPr/>
+                    <a:lstStyle/>
+                    <a:p>
+                      <a:pPr algn="l" indent="0" marL="0">
+                        <a:lnSpc>
+                          <a:spcPts val="2880"/>
+                        </a:lnSpc>
+                        <a:buNone/>
+                      </a:pPr>
+                      <a:r>
+                        <a:rPr lang="en-US" sz="2400" dirty="0" spc="0" kern="0">
+                          <a:solidFill>
+                            <a:srgbClr val="F3EEE3"/>
+                          </a:solidFill>
+                          <a:latin typeface="Be Vietnam Pro" pitchFamily="34" charset="0"/>
+                          <a:ea typeface="Be Vietnam Pro" pitchFamily="34" charset="-122"/>
+                          <a:cs typeface="Be Vietnam Pro" pitchFamily="34" charset="-120"/>
+                        </a:rPr>
+                        <a:t>Cờ</a:t>
+                      </a:r>
+                      <a:r>
+                        <a:rPr lang="en-US" sz="2400" dirty="0" spc="-12" kern="0">
+                          <a:solidFill>
+                            <a:srgbClr val="F3EEE3"/>
+                          </a:solidFill>
+                          <a:latin typeface="Be Vietnam Pro" pitchFamily="34" charset="0"/>
+                          <a:ea typeface="Be Vietnam Pro" pitchFamily="34" charset="-122"/>
+                          <a:cs typeface="Be Vietnam Pro" pitchFamily="34" charset="-120"/>
+                        </a:rPr>
+                        <a:t> vận</a:t>
+                      </a:r>
+                      <a:r>
+                        <a:rPr lang="en-US" sz="2400" dirty="0" spc="1" kern="0">
+                          <a:solidFill>
+                            <a:srgbClr val="F3EEE3"/>
+                          </a:solidFill>
+                          <a:latin typeface="Be Vietnam Pro" pitchFamily="34" charset="0"/>
+                          <a:ea typeface="Be Vietnam Pro" pitchFamily="34" charset="-122"/>
+                          <a:cs typeface="Be Vietnam Pro" pitchFamily="34" charset="-120"/>
+                        </a:rPr>
+                        <a:t> hành</a:t>
+                      </a:r>
+                      <a:endParaRPr lang="en-US" sz="1200" dirty="0"/>
+                    </a:p>
+                  </a:txBody>
+                  <a:tcPr marL="304800" marR="304800" marT="236220" marB="236220" anchor="ctr">
+                    <a:lnL w="0" cap="flat" cmpd="sng" algn="ctr">
+                      <a:noFill/>
+                    </a:lnL>
+                    <a:lnR w="0" cap="flat" cmpd="sng" algn="ctr">
+                      <a:noFill/>
+                    </a:lnR>
+                    <a:lnT w="19050" cap="flat" cmpd="sng" algn="ctr">
+                      <a:solidFill>
+                        <a:srgbClr val="3A3F4D"/>
+                      </a:solidFill>
+                      <a:prstDash val="solid"/>
+                      <a:round/>
+                      <a:headEnd type="none" w="med" len="med"/>
+                      <a:tailEnd type="none" w="med" len="med"/>
+                    </a:lnT>
+                    <a:lnB w="0" cap="flat" cmpd="sng" algn="ctr">
+                      <a:noFill/>
+                    </a:lnB>
+                    <a:solidFill>
+                      <a:srgbClr val="1E212B"/>
+                    </a:solidFill>
+                  </a:tcPr>
+                </a:tc>
+                <a:tc>
+                  <a:txBody>
+                    <a:bodyPr/>
+                    <a:lstStyle/>
+                    <a:p>
+                      <a:pPr algn="l" indent="0" marL="0">
+                        <a:lnSpc>
+                          <a:spcPts val="2880"/>
+                        </a:lnSpc>
+                        <a:buNone/>
+                      </a:pPr>
+                      <a:r>
+                        <a:rPr lang="en-US" sz="2400" dirty="0" spc="1" kern="0">
+                          <a:solidFill>
+                            <a:srgbClr val="F3EEE3"/>
+                          </a:solidFill>
+                          <a:latin typeface="Be Vietnam Pro" pitchFamily="34" charset="0"/>
+                          <a:ea typeface="Be Vietnam Pro" pitchFamily="34" charset="-122"/>
+                          <a:cs typeface="Be Vietnam Pro" pitchFamily="34" charset="-120"/>
+                        </a:rPr>
+                        <a:t>Công</a:t>
+                      </a:r>
+                      <a:r>
+                        <a:rPr lang="en-US" sz="2400" dirty="0" spc="-10" kern="0">
+                          <a:solidFill>
+                            <a:srgbClr val="F3EEE3"/>
+                          </a:solidFill>
+                          <a:latin typeface="Be Vietnam Pro" pitchFamily="34" charset="0"/>
+                          <a:ea typeface="Be Vietnam Pro" pitchFamily="34" charset="-122"/>
+                          <a:cs typeface="Be Vietnam Pro" pitchFamily="34" charset="-120"/>
+                        </a:rPr>
+                        <a:t> tắc</a:t>
+                      </a:r>
+                      <a:r>
+                        <a:rPr lang="en-US" sz="2400" dirty="0" spc="0" kern="0">
+                          <a:solidFill>
+                            <a:srgbClr val="F3EEE3"/>
+                          </a:solidFill>
+                          <a:latin typeface="Be Vietnam Pro" pitchFamily="34" charset="0"/>
+                          <a:ea typeface="Be Vietnam Pro" pitchFamily="34" charset="-122"/>
+                          <a:cs typeface="Be Vietnam Pro" pitchFamily="34" charset="-120"/>
+                        </a:rPr>
+                        <a:t> khẩn</a:t>
+                      </a:r>
+                      <a:r>
+                        <a:rPr lang="en-US" sz="2400" dirty="0" spc="1" kern="0">
+                          <a:solidFill>
+                            <a:srgbClr val="F3EEE3"/>
+                          </a:solidFill>
+                          <a:latin typeface="Be Vietnam Pro" pitchFamily="34" charset="0"/>
+                          <a:ea typeface="Be Vietnam Pro" pitchFamily="34" charset="-122"/>
+                          <a:cs typeface="Be Vietnam Pro" pitchFamily="34" charset="-120"/>
+                        </a:rPr>
+                        <a:t> cấp, có</a:t>
+                      </a:r>
+                      <a:r>
+                        <a:rPr lang="en-US" sz="2400" dirty="0" spc="0" kern="0">
+                          <a:solidFill>
+                            <a:srgbClr val="F3EEE3"/>
+                          </a:solidFill>
+                          <a:latin typeface="Be Vietnam Pro" pitchFamily="34" charset="0"/>
+                          <a:ea typeface="Be Vietnam Pro" pitchFamily="34" charset="-122"/>
+                          <a:cs typeface="Be Vietnam Pro" pitchFamily="34" charset="-120"/>
+                        </a:rPr>
+                        <a:t> thể</a:t>
+                      </a:r>
+                      <a:r>
+                        <a:rPr lang="en-US" sz="2400" dirty="0" spc="-4" kern="0">
+                          <a:solidFill>
+                            <a:srgbClr val="F3EEE3"/>
+                          </a:solidFill>
+                          <a:latin typeface="Be Vietnam Pro" pitchFamily="34" charset="0"/>
+                          <a:ea typeface="Be Vietnam Pro" pitchFamily="34" charset="-122"/>
+                          <a:cs typeface="Be Vietnam Pro" pitchFamily="34" charset="-120"/>
+                        </a:rPr>
+                        <a:t> sống</a:t>
+                      </a:r>
+                      <a:r>
+                        <a:rPr lang="en-US" sz="2400" dirty="0" spc="1" kern="0">
+                          <a:solidFill>
+                            <a:srgbClr val="F3EEE3"/>
+                          </a:solidFill>
+                          <a:latin typeface="Be Vietnam Pro" pitchFamily="34" charset="0"/>
+                          <a:ea typeface="Be Vietnam Pro" pitchFamily="34" charset="-122"/>
+                          <a:cs typeface="Be Vietnam Pro" pitchFamily="34" charset="-120"/>
+                        </a:rPr>
+                        <a:t> lâu hơn</a:t>
+                      </a:r>
+                      <a:endParaRPr lang="en-US" sz="1200" dirty="0"/>
+                    </a:p>
+                  </a:txBody>
+                  <a:tcPr marL="304800" marR="304800" marT="236220" marB="236220" anchor="ctr">
+                    <a:lnL w="19050" cap="flat" cmpd="sng" algn="ctr">
+                      <a:solidFill>
+                        <a:srgbClr val="3A3F4D"/>
+                      </a:solidFill>
+                      <a:prstDash val="solid"/>
+                      <a:round/>
+                      <a:headEnd type="none" w="med" len="med"/>
+                      <a:tailEnd type="none" w="med" len="med"/>
+                    </a:lnL>
+                    <a:lnR w="0" cap="flat" cmpd="sng" algn="ctr">
+                      <a:noFill/>
+                    </a:lnR>
+                    <a:lnT w="19050" cap="flat" cmpd="sng" algn="ctr">
+                      <a:solidFill>
+                        <a:srgbClr val="3A3F4D"/>
+                      </a:solidFill>
+                      <a:prstDash val="solid"/>
+                      <a:round/>
+                      <a:headEnd type="none" w="med" len="med"/>
+                      <a:tailEnd type="none" w="med" len="med"/>
+                    </a:lnT>
+                    <a:lnB w="0" cap="flat" cmpd="sng" algn="ctr">
+                      <a:noFill/>
+                    </a:lnB>
+                    <a:solidFill>
+                      <a:srgbClr val="1E212B"/>
+                    </a:solidFill>
+                  </a:tcPr>
+                </a:tc>
+              </a:tr>
+              <a:tr h="838200">
                 <a:tc>
                   <a:txBody>
                     <a:bodyPr/>
@@ -3252,7 +3446,7 @@
                       <a:endParaRPr lang="en-US" sz="1200" dirty="0"/>
                     </a:p>
                   </a:txBody>
-                  <a:tcPr marL="304800" marR="304800" marT="304800" marB="304800" anchor="ctr">
+                  <a:tcPr marL="304800" marR="304800" marT="236220" marB="236220" anchor="ctr">
                     <a:lnL w="0" cap="flat" cmpd="sng" algn="ctr">
                       <a:noFill/>
                     </a:lnL>
@@ -3345,7 +3539,7 @@
                       <a:endParaRPr lang="en-US" sz="1200" dirty="0"/>
                     </a:p>
                   </a:txBody>
-                  <a:tcPr marL="304800" marR="304800" marT="304800" marB="304800" anchor="ctr">
+                  <a:tcPr marL="304800" marR="304800" marT="236220" marB="236220" anchor="ctr">
                     <a:lnL w="19050" cap="flat" cmpd="sng" algn="ctr">
                       <a:solidFill>
                         <a:srgbClr val="3A3F4D"/>
@@ -3376,7 +3570,7 @@
                   </a:tcPr>
                 </a:tc>
               </a:tr>
-              <a:tr h="1047750">
+              <a:tr h="838200">
                 <a:tc>
                   <a:txBody>
                     <a:bodyPr/>
@@ -3402,7 +3596,7 @@
                       <a:endParaRPr lang="en-US" sz="1200" dirty="0"/>
                     </a:p>
                   </a:txBody>
-                  <a:tcPr marL="304800" marR="304800" marT="304800" marB="304800" anchor="ctr">
+                  <a:tcPr marL="304800" marR="304800" marT="236220" marB="236220" anchor="ctr">
                     <a:lnL w="0" cap="flat" cmpd="sng" algn="ctr">
                       <a:noFill/>
                     </a:lnL>
@@ -3462,7 +3656,7 @@
                       <a:endParaRPr lang="en-US" sz="1200" dirty="0"/>
                     </a:p>
                   </a:txBody>
-                  <a:tcPr marL="304800" marR="304800" marT="304800" marB="304800" anchor="ctr">
+                  <a:tcPr marL="304800" marR="304800" marT="236220" marB="236220" anchor="ctr">
                     <a:lnL w="19050" cap="flat" cmpd="sng" algn="ctr">
                       <a:solidFill>
                         <a:srgbClr val="3A3F4D"/>
